--- a/public/lessons/year-6-maths/spring/week-16/compare-fractions-decimals-and-percentages/teaching-powerpoint-v1.pptx
+++ b/public/lessons/year-6-maths/spring/week-16/compare-fractions-decimals-and-percentages/teaching-powerpoint-v1.pptx
@@ -2,24 +2,24 @@
 <file path=ppt/presentation.xml><?xml version="1.0" encoding="utf-8"?>
 <p:presentation xmlns:p="http://schemas.openxmlformats.org/presentationml/2006/main">
   <p:sldMasterIdLst>
-    <p:sldMasterId xmlns:r="http://schemas.openxmlformats.org/officeDocument/2006/relationships" id="2147483648" r:id="Rc9fe7f1e2cd84cc1"/>
+    <p:sldMasterId xmlns:r="http://schemas.openxmlformats.org/officeDocument/2006/relationships" id="2147483648" r:id="Ra491c8086c604b5b"/>
   </p:sldMasterIdLst>
   <p:notesMasterIdLst>
-    <p:notesMasterId xmlns:r="http://schemas.openxmlformats.org/officeDocument/2006/relationships" r:id="R636086fbc2be4511"/>
+    <p:notesMasterId xmlns:r="http://schemas.openxmlformats.org/officeDocument/2006/relationships" r:id="Rd7455bfa87304cdb"/>
   </p:notesMasterIdLst>
   <p:sldIdLst>
-    <p:sldId xmlns:r="http://schemas.openxmlformats.org/officeDocument/2006/relationships" id="256" r:id="R9280f138aaca46d7"/>
-    <p:sldId xmlns:r="http://schemas.openxmlformats.org/officeDocument/2006/relationships" id="257" r:id="Rf52e3d2c6f794b90"/>
-    <p:sldId xmlns:r="http://schemas.openxmlformats.org/officeDocument/2006/relationships" id="258" r:id="R25f1e889c83d403d"/>
-    <p:sldId xmlns:r="http://schemas.openxmlformats.org/officeDocument/2006/relationships" id="259" r:id="R40f273f436d54fbf"/>
-    <p:sldId xmlns:r="http://schemas.openxmlformats.org/officeDocument/2006/relationships" id="260" r:id="Rd263b8a26b5745f6"/>
-    <p:sldId xmlns:r="http://schemas.openxmlformats.org/officeDocument/2006/relationships" id="261" r:id="R5e1dd86731c34b78"/>
-    <p:sldId xmlns:r="http://schemas.openxmlformats.org/officeDocument/2006/relationships" id="262" r:id="Rcd6d4a11b1324427"/>
-    <p:sldId xmlns:r="http://schemas.openxmlformats.org/officeDocument/2006/relationships" id="263" r:id="Rc6d727044106499f"/>
-    <p:sldId xmlns:r="http://schemas.openxmlformats.org/officeDocument/2006/relationships" id="264" r:id="R417012292b1b44d5"/>
-    <p:sldId xmlns:r="http://schemas.openxmlformats.org/officeDocument/2006/relationships" id="265" r:id="R7851dbcdbf4e42dd"/>
-    <p:sldId xmlns:r="http://schemas.openxmlformats.org/officeDocument/2006/relationships" id="266" r:id="R823eb97c9afc475e"/>
-    <p:sldId xmlns:r="http://schemas.openxmlformats.org/officeDocument/2006/relationships" id="267" r:id="Rf150598ebcaf4b03"/>
+    <p:sldId xmlns:r="http://schemas.openxmlformats.org/officeDocument/2006/relationships" id="256" r:id="R5e927e4549fc435d"/>
+    <p:sldId xmlns:r="http://schemas.openxmlformats.org/officeDocument/2006/relationships" id="257" r:id="Rb64de8a1f71f411e"/>
+    <p:sldId xmlns:r="http://schemas.openxmlformats.org/officeDocument/2006/relationships" id="258" r:id="Re668a22264a446ff"/>
+    <p:sldId xmlns:r="http://schemas.openxmlformats.org/officeDocument/2006/relationships" id="259" r:id="R36ed03a586e84713"/>
+    <p:sldId xmlns:r="http://schemas.openxmlformats.org/officeDocument/2006/relationships" id="260" r:id="Red725d86a18b492c"/>
+    <p:sldId xmlns:r="http://schemas.openxmlformats.org/officeDocument/2006/relationships" id="261" r:id="R079f9fc30da848d7"/>
+    <p:sldId xmlns:r="http://schemas.openxmlformats.org/officeDocument/2006/relationships" id="262" r:id="R58fb95022a604c12"/>
+    <p:sldId xmlns:r="http://schemas.openxmlformats.org/officeDocument/2006/relationships" id="263" r:id="R9af0e0c42fc04676"/>
+    <p:sldId xmlns:r="http://schemas.openxmlformats.org/officeDocument/2006/relationships" id="264" r:id="R7c8d1b88b87a458a"/>
+    <p:sldId xmlns:r="http://schemas.openxmlformats.org/officeDocument/2006/relationships" id="265" r:id="R4bece6b65491486e"/>
+    <p:sldId xmlns:r="http://schemas.openxmlformats.org/officeDocument/2006/relationships" id="266" r:id="R1f209b5bce1c40f8"/>
+    <p:sldId xmlns:r="http://schemas.openxmlformats.org/officeDocument/2006/relationships" id="267" r:id="R91074fcb070d43be"/>
   </p:sldIdLst>
   <p:sldSz cx="12192000" cy="6858000"/>
   <p:notesSz cx="6858000" cy="9144000"/>
@@ -873,7 +873,7 @@
           <a:lstStyle xmlns:a="http://schemas.openxmlformats.org/drawingml/2006/main"/>
           <a:p xmlns:a="http://schemas.openxmlformats.org/drawingml/2006/main">
             <a:r>
-              <a:t>I do. Reveal the question, setup and each calculation stage one click at a time. Pupils watch before copying. Model answer: 0.58, 3/5, 62%.</a:t>
+              <a:t>I do. Reveal the question, then reveal each mathematical change one click at a time. Point to the numbers and operation that changed before moving to the next line. Final answer: 0.58, 3/5, 62%.</a:t>
             </a:r>
           </a:p>
         </p:txBody>
@@ -1291,7 +1291,7 @@
   </p:cSld>
   <p:clrMap bg1="lt1" tx1="dk1" bg2="lt2" tx2="dk2" accent1="accent1" accent2="accent2" accent3="accent3" accent4="accent4" accent5="accent5" accent6="accent6" hlink="hlink" folHlink="folHlink"/>
   <p:sldLayoutIdLst>
-    <p:sldLayoutId xmlns:r="http://schemas.openxmlformats.org/officeDocument/2006/relationships" id="2147483649" r:id="R46aa34c980414ea9"/>
+    <p:sldLayoutId xmlns:r="http://schemas.openxmlformats.org/officeDocument/2006/relationships" id="2147483649" r:id="R56d6d505986e4349"/>
   </p:sldLayoutIdLst>
   <p:txStyles>
     <p:titleStyle>
@@ -1842,7 +1842,7 @@
           <p:cNvPr id="12" name="">
             <a:extLst xmlns:a="http://schemas.openxmlformats.org/drawingml/2006/main">
               <a:ext uri="{FF2B5EF4-FFF2-40B4-BE49-F238E27FC236}">
-                <a16:creationId xmlns:a16="http://schemas.microsoft.com/office/drawing/2014/main" id="{895314A0-F165-46F2-9A43-09530CA1146C}"/>
+                <a16:creationId xmlns:a16="http://schemas.microsoft.com/office/drawing/2014/main" id="{4B1626A2-9FFF-402C-AEF7-E1D6E977115E}"/>
               </a:ext>
             </a:extLst>
           </p:cNvPr>
@@ -1874,7 +1874,7 @@
           <p:cNvPr id="2" name="">
             <a:extLst xmlns:a="http://schemas.openxmlformats.org/drawingml/2006/main">
               <a:ext uri="{FF2B5EF4-FFF2-40B4-BE49-F238E27FC236}">
-                <a16:creationId xmlns:a16="http://schemas.microsoft.com/office/drawing/2014/main" id="{2F39003E-E3A3-492E-B47A-0C1D2A4030FA}"/>
+                <a16:creationId xmlns:a16="http://schemas.microsoft.com/office/drawing/2014/main" id="{13BBAE80-3181-41F9-AB9E-F1C224D0FBE2}"/>
               </a:ext>
             </a:extLst>
           </p:cNvPr>
@@ -1931,7 +1931,7 @@
           <p:cNvPr id="3" name="">
             <a:extLst xmlns:a="http://schemas.openxmlformats.org/drawingml/2006/main">
               <a:ext uri="{FF2B5EF4-FFF2-40B4-BE49-F238E27FC236}">
-                <a16:creationId xmlns:a16="http://schemas.microsoft.com/office/drawing/2014/main" id="{20F4CECF-E275-47AE-9692-56F8F20B3353}"/>
+                <a16:creationId xmlns:a16="http://schemas.microsoft.com/office/drawing/2014/main" id="{B9BC9073-AEFD-45DA-8CBF-04CEE24C4B3E}"/>
               </a:ext>
             </a:extLst>
           </p:cNvPr>
@@ -1965,7 +1965,7 @@
           <p:cNvPr id="4" name="">
             <a:extLst xmlns:a="http://schemas.openxmlformats.org/drawingml/2006/main">
               <a:ext uri="{FF2B5EF4-FFF2-40B4-BE49-F238E27FC236}">
-                <a16:creationId xmlns:a16="http://schemas.microsoft.com/office/drawing/2014/main" id="{CA5F18B4-3861-4E1A-8A3C-F108CCCDF4DB}"/>
+                <a16:creationId xmlns:a16="http://schemas.microsoft.com/office/drawing/2014/main" id="{10233D2A-D9C4-45BD-BC5B-9270DCD2BAF6}"/>
               </a:ext>
             </a:extLst>
           </p:cNvPr>
@@ -2022,7 +2022,7 @@
           <p:cNvPr id="5" name="">
             <a:extLst xmlns:a="http://schemas.openxmlformats.org/drawingml/2006/main">
               <a:ext uri="{FF2B5EF4-FFF2-40B4-BE49-F238E27FC236}">
-                <a16:creationId xmlns:a16="http://schemas.microsoft.com/office/drawing/2014/main" id="{83F99F92-1F09-45FD-84B1-7D42EBEF9CAA}"/>
+                <a16:creationId xmlns:a16="http://schemas.microsoft.com/office/drawing/2014/main" id="{C9FEE74B-C0A0-4AC6-BF74-115809D318D2}"/>
               </a:ext>
             </a:extLst>
           </p:cNvPr>
@@ -2079,7 +2079,7 @@
           <p:cNvPr id="6" name="">
             <a:extLst xmlns:a="http://schemas.openxmlformats.org/drawingml/2006/main">
               <a:ext uri="{FF2B5EF4-FFF2-40B4-BE49-F238E27FC236}">
-                <a16:creationId xmlns:a16="http://schemas.microsoft.com/office/drawing/2014/main" id="{64D953B8-A340-4BD3-8457-2304BD6DB256}"/>
+                <a16:creationId xmlns:a16="http://schemas.microsoft.com/office/drawing/2014/main" id="{A1E3647D-AC43-47E0-B4B0-C2834995AA34}"/>
               </a:ext>
             </a:extLst>
           </p:cNvPr>
@@ -2113,7 +2113,7 @@
           <p:cNvPr id="7" name="">
             <a:extLst xmlns:a="http://schemas.openxmlformats.org/drawingml/2006/main">
               <a:ext uri="{FF2B5EF4-FFF2-40B4-BE49-F238E27FC236}">
-                <a16:creationId xmlns:a16="http://schemas.microsoft.com/office/drawing/2014/main" id="{2FEA0913-9FE5-4EDE-AFEF-08D11DC05B52}"/>
+                <a16:creationId xmlns:a16="http://schemas.microsoft.com/office/drawing/2014/main" id="{61168C52-D04B-42F7-BB56-5A0D1C0697F8}"/>
               </a:ext>
             </a:extLst>
           </p:cNvPr>
@@ -2170,7 +2170,7 @@
           <p:cNvPr id="8" name="">
             <a:extLst xmlns:a="http://schemas.openxmlformats.org/drawingml/2006/main">
               <a:ext uri="{FF2B5EF4-FFF2-40B4-BE49-F238E27FC236}">
-                <a16:creationId xmlns:a16="http://schemas.microsoft.com/office/drawing/2014/main" id="{4DD99905-104D-4778-9E2B-C76CC8332E71}"/>
+                <a16:creationId xmlns:a16="http://schemas.microsoft.com/office/drawing/2014/main" id="{A8A2AAF2-63F8-4AB7-A74D-E0351FAF1043}"/>
               </a:ext>
             </a:extLst>
           </p:cNvPr>
@@ -2227,7 +2227,7 @@
           <p:cNvPr id="9" name="">
             <a:extLst xmlns:a="http://schemas.openxmlformats.org/drawingml/2006/main">
               <a:ext uri="{FF2B5EF4-FFF2-40B4-BE49-F238E27FC236}">
-                <a16:creationId xmlns:a16="http://schemas.microsoft.com/office/drawing/2014/main" id="{70DA1E9A-7B2E-499C-91B7-90910A1B0C6E}"/>
+                <a16:creationId xmlns:a16="http://schemas.microsoft.com/office/drawing/2014/main" id="{57DFDDD1-76F9-4A4E-BF4A-89B8F60661DC}"/>
               </a:ext>
             </a:extLst>
           </p:cNvPr>
@@ -2284,7 +2284,7 @@
           <p:cNvPr id="10" name="">
             <a:extLst xmlns:a="http://schemas.openxmlformats.org/drawingml/2006/main">
               <a:ext uri="{FF2B5EF4-FFF2-40B4-BE49-F238E27FC236}">
-                <a16:creationId xmlns:a16="http://schemas.microsoft.com/office/drawing/2014/main" id="{701A08E2-50C3-4813-A976-B368D5E1238B}"/>
+                <a16:creationId xmlns:a16="http://schemas.microsoft.com/office/drawing/2014/main" id="{07CA1DA4-4FF6-4253-B83A-A0E49C43789B}"/>
               </a:ext>
             </a:extLst>
           </p:cNvPr>
@@ -2341,7 +2341,7 @@
           <p:cNvPr id="11" name="">
             <a:extLst xmlns:a="http://schemas.openxmlformats.org/drawingml/2006/main">
               <a:ext uri="{FF2B5EF4-FFF2-40B4-BE49-F238E27FC236}">
-                <a16:creationId xmlns:a16="http://schemas.microsoft.com/office/drawing/2014/main" id="{D6D8CBD6-86D2-4936-A038-CB38CF9F6FEB}"/>
+                <a16:creationId xmlns:a16="http://schemas.microsoft.com/office/drawing/2014/main" id="{546E2E60-BAFD-4A39-BF7B-1C378CC948C4}"/>
               </a:ext>
             </a:extLst>
           </p:cNvPr>
@@ -2396,7 +2396,7 @@
     </p:spTree>
     <p:extLst>
       <p:ext uri="{BB962C8B-B14F-4D97-AF65-F5344CB8AC3E}">
-        <p14:creationId xmlns:p14="http://schemas.microsoft.com/office/powerpoint/2010/main" val="1080326918"/>
+        <p14:creationId xmlns:p14="http://schemas.microsoft.com/office/powerpoint/2010/main" val="1589353298"/>
       </p:ext>
     </p:extLst>
   </p:cSld>
@@ -2427,7 +2427,7 @@
           <p:cNvPr id="14" name="">
             <a:extLst xmlns:a="http://schemas.openxmlformats.org/drawingml/2006/main">
               <a:ext uri="{FF2B5EF4-FFF2-40B4-BE49-F238E27FC236}">
-                <a16:creationId xmlns:a16="http://schemas.microsoft.com/office/drawing/2014/main" id="{9AD95676-8ED9-478D-9A1A-C7B13AF43C40}"/>
+                <a16:creationId xmlns:a16="http://schemas.microsoft.com/office/drawing/2014/main" id="{4B22994F-3723-4FB6-8DDB-E4E8365DEF34}"/>
               </a:ext>
             </a:extLst>
           </p:cNvPr>
@@ -2459,7 +2459,7 @@
           <p:cNvPr id="2" name="">
             <a:extLst xmlns:a="http://schemas.openxmlformats.org/drawingml/2006/main">
               <a:ext uri="{FF2B5EF4-FFF2-40B4-BE49-F238E27FC236}">
-                <a16:creationId xmlns:a16="http://schemas.microsoft.com/office/drawing/2014/main" id="{DCC2597B-D395-431E-8B1E-8C25FB0E0A00}"/>
+                <a16:creationId xmlns:a16="http://schemas.microsoft.com/office/drawing/2014/main" id="{69ABC48A-C711-4682-BC0A-571C96077F54}"/>
               </a:ext>
             </a:extLst>
           </p:cNvPr>
@@ -2516,7 +2516,7 @@
           <p:cNvPr id="3" name="">
             <a:extLst xmlns:a="http://schemas.openxmlformats.org/drawingml/2006/main">
               <a:ext uri="{FF2B5EF4-FFF2-40B4-BE49-F238E27FC236}">
-                <a16:creationId xmlns:a16="http://schemas.microsoft.com/office/drawing/2014/main" id="{25A71B3C-65F8-4FF9-B7D6-53937BBD07A4}"/>
+                <a16:creationId xmlns:a16="http://schemas.microsoft.com/office/drawing/2014/main" id="{4D0A908D-D59E-45BF-BB76-D6D6BBC68168}"/>
               </a:ext>
             </a:extLst>
           </p:cNvPr>
@@ -2548,7 +2548,7 @@
           <p:cNvPr id="4" name="">
             <a:extLst xmlns:a="http://schemas.openxmlformats.org/drawingml/2006/main">
               <a:ext uri="{FF2B5EF4-FFF2-40B4-BE49-F238E27FC236}">
-                <a16:creationId xmlns:a16="http://schemas.microsoft.com/office/drawing/2014/main" id="{DE185544-5C5C-47B5-9375-E417A780DD55}"/>
+                <a16:creationId xmlns:a16="http://schemas.microsoft.com/office/drawing/2014/main" id="{D076E2BF-D2FC-41B3-B4B8-847D508DCC8F}"/>
               </a:ext>
             </a:extLst>
           </p:cNvPr>
@@ -2605,7 +2605,7 @@
           <p:cNvPr id="5" name="">
             <a:extLst xmlns:a="http://schemas.openxmlformats.org/drawingml/2006/main">
               <a:ext uri="{FF2B5EF4-FFF2-40B4-BE49-F238E27FC236}">
-                <a16:creationId xmlns:a16="http://schemas.microsoft.com/office/drawing/2014/main" id="{88D8257A-9968-46A9-825F-9A013AE753F4}"/>
+                <a16:creationId xmlns:a16="http://schemas.microsoft.com/office/drawing/2014/main" id="{F9656F44-7E92-4E77-924A-95803204E2BE}"/>
               </a:ext>
             </a:extLst>
           </p:cNvPr>
@@ -2662,7 +2662,7 @@
           <p:cNvPr id="6" name="">
             <a:extLst xmlns:a="http://schemas.openxmlformats.org/drawingml/2006/main">
               <a:ext uri="{FF2B5EF4-FFF2-40B4-BE49-F238E27FC236}">
-                <a16:creationId xmlns:a16="http://schemas.microsoft.com/office/drawing/2014/main" id="{2396966B-7F17-4070-B8CC-0D6EA6D967AF}"/>
+                <a16:creationId xmlns:a16="http://schemas.microsoft.com/office/drawing/2014/main" id="{C2C8ABB9-4C5F-43BD-9D93-62D2BC604B86}"/>
               </a:ext>
             </a:extLst>
           </p:cNvPr>
@@ -2719,7 +2719,7 @@
           <p:cNvPr id="7" name="">
             <a:extLst xmlns:a="http://schemas.openxmlformats.org/drawingml/2006/main">
               <a:ext uri="{FF2B5EF4-FFF2-40B4-BE49-F238E27FC236}">
-                <a16:creationId xmlns:a16="http://schemas.microsoft.com/office/drawing/2014/main" id="{5A876BFD-F66A-421E-A1AE-E74678899114}"/>
+                <a16:creationId xmlns:a16="http://schemas.microsoft.com/office/drawing/2014/main" id="{C1D33A2B-A929-494E-BCDF-1716A8DE5CF0}"/>
               </a:ext>
             </a:extLst>
           </p:cNvPr>
@@ -2751,7 +2751,7 @@
           <p:cNvPr id="8" name="">
             <a:extLst xmlns:a="http://schemas.openxmlformats.org/drawingml/2006/main">
               <a:ext uri="{FF2B5EF4-FFF2-40B4-BE49-F238E27FC236}">
-                <a16:creationId xmlns:a16="http://schemas.microsoft.com/office/drawing/2014/main" id="{69ADE651-8B2C-4A3C-B3DA-212CB4EA49CA}"/>
+                <a16:creationId xmlns:a16="http://schemas.microsoft.com/office/drawing/2014/main" id="{C4BD1B0A-AD05-460E-BF55-B1733B6482ED}"/>
               </a:ext>
             </a:extLst>
           </p:cNvPr>
@@ -2808,7 +2808,7 @@
           <p:cNvPr id="9" name="">
             <a:extLst xmlns:a="http://schemas.openxmlformats.org/drawingml/2006/main">
               <a:ext uri="{FF2B5EF4-FFF2-40B4-BE49-F238E27FC236}">
-                <a16:creationId xmlns:a16="http://schemas.microsoft.com/office/drawing/2014/main" id="{E387FCAC-BBB7-4375-ACCD-9A0CC644FDCB}"/>
+                <a16:creationId xmlns:a16="http://schemas.microsoft.com/office/drawing/2014/main" id="{05D29A35-C18C-44F0-A22D-3BBF1A6EE9EB}"/>
               </a:ext>
             </a:extLst>
           </p:cNvPr>
@@ -2865,7 +2865,7 @@
           <p:cNvPr id="10" name="">
             <a:extLst xmlns:a="http://schemas.openxmlformats.org/drawingml/2006/main">
               <a:ext uri="{FF2B5EF4-FFF2-40B4-BE49-F238E27FC236}">
-                <a16:creationId xmlns:a16="http://schemas.microsoft.com/office/drawing/2014/main" id="{321EE27E-2EE4-4CE6-8C5B-F22E57EBECA8}"/>
+                <a16:creationId xmlns:a16="http://schemas.microsoft.com/office/drawing/2014/main" id="{7C114EBD-F020-4DE7-90CB-AEDDCFEFE268}"/>
               </a:ext>
             </a:extLst>
           </p:cNvPr>
@@ -2922,7 +2922,7 @@
           <p:cNvPr id="11" name="">
             <a:extLst xmlns:a="http://schemas.openxmlformats.org/drawingml/2006/main">
               <a:ext uri="{FF2B5EF4-FFF2-40B4-BE49-F238E27FC236}">
-                <a16:creationId xmlns:a16="http://schemas.microsoft.com/office/drawing/2014/main" id="{DB93EB4D-9368-4836-83F2-A0FFCA09BEA5}"/>
+                <a16:creationId xmlns:a16="http://schemas.microsoft.com/office/drawing/2014/main" id="{003FC70F-FF50-4484-A194-5D30609401A1}"/>
               </a:ext>
             </a:extLst>
           </p:cNvPr>
@@ -2979,7 +2979,7 @@
           <p:cNvPr id="12" name="">
             <a:extLst xmlns:a="http://schemas.openxmlformats.org/drawingml/2006/main">
               <a:ext uri="{FF2B5EF4-FFF2-40B4-BE49-F238E27FC236}">
-                <a16:creationId xmlns:a16="http://schemas.microsoft.com/office/drawing/2014/main" id="{86DBA819-B64F-4814-88DB-737627E02C7F}"/>
+                <a16:creationId xmlns:a16="http://schemas.microsoft.com/office/drawing/2014/main" id="{EBBCF538-0546-4CD5-B8C8-CCBA4DB8F45D}"/>
               </a:ext>
             </a:extLst>
           </p:cNvPr>
@@ -3036,7 +3036,7 @@
           <p:cNvPr id="13" name="">
             <a:extLst xmlns:a="http://schemas.openxmlformats.org/drawingml/2006/main">
               <a:ext uri="{FF2B5EF4-FFF2-40B4-BE49-F238E27FC236}">
-                <a16:creationId xmlns:a16="http://schemas.microsoft.com/office/drawing/2014/main" id="{CE0A13CB-1CCC-45A4-9D62-08AA6422A5A3}"/>
+                <a16:creationId xmlns:a16="http://schemas.microsoft.com/office/drawing/2014/main" id="{C032326F-DE24-41DD-8F93-66DEAAB48F24}"/>
               </a:ext>
             </a:extLst>
           </p:cNvPr>
@@ -3091,7 +3091,7 @@
     </p:spTree>
     <p:extLst>
       <p:ext uri="{BB962C8B-B14F-4D97-AF65-F5344CB8AC3E}">
-        <p14:creationId xmlns:p14="http://schemas.microsoft.com/office/powerpoint/2010/main" val="404063191"/>
+        <p14:creationId xmlns:p14="http://schemas.microsoft.com/office/powerpoint/2010/main" val="336846444"/>
       </p:ext>
     </p:extLst>
   </p:cSld>
@@ -3292,7 +3292,7 @@
           <p:cNvPr id="19" name="">
             <a:extLst xmlns:a="http://schemas.openxmlformats.org/drawingml/2006/main">
               <a:ext uri="{FF2B5EF4-FFF2-40B4-BE49-F238E27FC236}">
-                <a16:creationId xmlns:a16="http://schemas.microsoft.com/office/drawing/2014/main" id="{AC0641E7-1A09-40E4-AE56-B00645C9708A}"/>
+                <a16:creationId xmlns:a16="http://schemas.microsoft.com/office/drawing/2014/main" id="{06CC21E2-DBB2-46E9-A6E4-553B825F60AD}"/>
               </a:ext>
             </a:extLst>
           </p:cNvPr>
@@ -3324,7 +3324,7 @@
           <p:cNvPr id="2" name="">
             <a:extLst xmlns:a="http://schemas.openxmlformats.org/drawingml/2006/main">
               <a:ext uri="{FF2B5EF4-FFF2-40B4-BE49-F238E27FC236}">
-                <a16:creationId xmlns:a16="http://schemas.microsoft.com/office/drawing/2014/main" id="{F0B7D154-F0B1-49A2-A693-1AE9BAC1780F}"/>
+                <a16:creationId xmlns:a16="http://schemas.microsoft.com/office/drawing/2014/main" id="{06F5EE2B-995D-4E55-BEB3-4E07FCFF5906}"/>
               </a:ext>
             </a:extLst>
           </p:cNvPr>
@@ -3381,7 +3381,7 @@
           <p:cNvPr id="3" name="">
             <a:extLst xmlns:a="http://schemas.openxmlformats.org/drawingml/2006/main">
               <a:ext uri="{FF2B5EF4-FFF2-40B4-BE49-F238E27FC236}">
-                <a16:creationId xmlns:a16="http://schemas.microsoft.com/office/drawing/2014/main" id="{CC9101AE-28C3-42DB-A2C7-397A8A50C7C0}"/>
+                <a16:creationId xmlns:a16="http://schemas.microsoft.com/office/drawing/2014/main" id="{03DA654B-6C95-4E06-BD61-C0D31BB3C278}"/>
               </a:ext>
             </a:extLst>
           </p:cNvPr>
@@ -3413,7 +3413,7 @@
           <p:cNvPr id="4" name="">
             <a:extLst xmlns:a="http://schemas.openxmlformats.org/drawingml/2006/main">
               <a:ext uri="{FF2B5EF4-FFF2-40B4-BE49-F238E27FC236}">
-                <a16:creationId xmlns:a16="http://schemas.microsoft.com/office/drawing/2014/main" id="{98687F50-ABFF-4A97-BA45-25E9394FFACA}"/>
+                <a16:creationId xmlns:a16="http://schemas.microsoft.com/office/drawing/2014/main" id="{F3C193E1-A440-43A0-AE18-26E073223E90}"/>
               </a:ext>
             </a:extLst>
           </p:cNvPr>
@@ -3470,7 +3470,7 @@
           <p:cNvPr id="5" name="">
             <a:extLst xmlns:a="http://schemas.openxmlformats.org/drawingml/2006/main">
               <a:ext uri="{FF2B5EF4-FFF2-40B4-BE49-F238E27FC236}">
-                <a16:creationId xmlns:a16="http://schemas.microsoft.com/office/drawing/2014/main" id="{9D1D396B-FA1E-4E44-97CD-F250B9E5A742}"/>
+                <a16:creationId xmlns:a16="http://schemas.microsoft.com/office/drawing/2014/main" id="{FE0B796D-FFC6-488C-B9EF-7B8763AFB2EB}"/>
               </a:ext>
             </a:extLst>
           </p:cNvPr>
@@ -3527,7 +3527,7 @@
           <p:cNvPr id="6" name="">
             <a:extLst xmlns:a="http://schemas.openxmlformats.org/drawingml/2006/main">
               <a:ext uri="{FF2B5EF4-FFF2-40B4-BE49-F238E27FC236}">
-                <a16:creationId xmlns:a16="http://schemas.microsoft.com/office/drawing/2014/main" id="{CBE2FA2E-863C-41C5-9994-F60CCFB20990}"/>
+                <a16:creationId xmlns:a16="http://schemas.microsoft.com/office/drawing/2014/main" id="{20BBDBD4-DC0C-4F13-8BB1-1E507E454CC9}"/>
               </a:ext>
             </a:extLst>
           </p:cNvPr>
@@ -3584,7 +3584,7 @@
           <p:cNvPr id="7" name="">
             <a:extLst xmlns:a="http://schemas.openxmlformats.org/drawingml/2006/main">
               <a:ext uri="{FF2B5EF4-FFF2-40B4-BE49-F238E27FC236}">
-                <a16:creationId xmlns:a16="http://schemas.microsoft.com/office/drawing/2014/main" id="{7FAB53AB-7E1C-4C3E-B959-C107EB06C691}"/>
+                <a16:creationId xmlns:a16="http://schemas.microsoft.com/office/drawing/2014/main" id="{EAD249F3-5D13-44DC-AB31-D644370E8F0D}"/>
               </a:ext>
             </a:extLst>
           </p:cNvPr>
@@ -3616,7 +3616,7 @@
           <p:cNvPr id="8" name="">
             <a:extLst xmlns:a="http://schemas.openxmlformats.org/drawingml/2006/main">
               <a:ext uri="{FF2B5EF4-FFF2-40B4-BE49-F238E27FC236}">
-                <a16:creationId xmlns:a16="http://schemas.microsoft.com/office/drawing/2014/main" id="{72591905-56B7-4219-AB82-C7D5F4769017}"/>
+                <a16:creationId xmlns:a16="http://schemas.microsoft.com/office/drawing/2014/main" id="{FB3D3F03-A31D-449C-BD10-6C15DC14D2FC}"/>
               </a:ext>
             </a:extLst>
           </p:cNvPr>
@@ -3673,7 +3673,7 @@
           <p:cNvPr id="9" name="">
             <a:extLst xmlns:a="http://schemas.openxmlformats.org/drawingml/2006/main">
               <a:ext uri="{FF2B5EF4-FFF2-40B4-BE49-F238E27FC236}">
-                <a16:creationId xmlns:a16="http://schemas.microsoft.com/office/drawing/2014/main" id="{6A7EDA24-CFA0-4FDF-9A8E-0E8F7014FADD}"/>
+                <a16:creationId xmlns:a16="http://schemas.microsoft.com/office/drawing/2014/main" id="{091D3F37-A391-4A16-A7D8-0782C36C9020}"/>
               </a:ext>
             </a:extLst>
           </p:cNvPr>
@@ -3730,7 +3730,7 @@
           <p:cNvPr id="10" name="">
             <a:extLst xmlns:a="http://schemas.openxmlformats.org/drawingml/2006/main">
               <a:ext uri="{FF2B5EF4-FFF2-40B4-BE49-F238E27FC236}">
-                <a16:creationId xmlns:a16="http://schemas.microsoft.com/office/drawing/2014/main" id="{15A9A36D-F472-40A8-8B00-DC69AF273AFF}"/>
+                <a16:creationId xmlns:a16="http://schemas.microsoft.com/office/drawing/2014/main" id="{9511B67E-37B4-418A-9430-DF5CD3AB5A87}"/>
               </a:ext>
             </a:extLst>
           </p:cNvPr>
@@ -3787,7 +3787,7 @@
           <p:cNvPr id="11" name="">
             <a:extLst xmlns:a="http://schemas.openxmlformats.org/drawingml/2006/main">
               <a:ext uri="{FF2B5EF4-FFF2-40B4-BE49-F238E27FC236}">
-                <a16:creationId xmlns:a16="http://schemas.microsoft.com/office/drawing/2014/main" id="{063F2732-0B1C-468A-A4AF-3834A07AA9AE}"/>
+                <a16:creationId xmlns:a16="http://schemas.microsoft.com/office/drawing/2014/main" id="{B15134A8-59F0-43D8-9A20-DF6836497FB3}"/>
               </a:ext>
             </a:extLst>
           </p:cNvPr>
@@ -3821,7 +3821,7 @@
           <p:cNvPr id="12" name="">
             <a:extLst xmlns:a="http://schemas.openxmlformats.org/drawingml/2006/main">
               <a:ext uri="{FF2B5EF4-FFF2-40B4-BE49-F238E27FC236}">
-                <a16:creationId xmlns:a16="http://schemas.microsoft.com/office/drawing/2014/main" id="{05FEF49A-A63D-42D8-9B09-4858EF6A4A14}"/>
+                <a16:creationId xmlns:a16="http://schemas.microsoft.com/office/drawing/2014/main" id="{B7B97673-2163-4013-B1AE-65FCD94DBC24}"/>
               </a:ext>
             </a:extLst>
           </p:cNvPr>
@@ -3878,7 +3878,7 @@
           <p:cNvPr id="13" name="">
             <a:extLst xmlns:a="http://schemas.openxmlformats.org/drawingml/2006/main">
               <a:ext uri="{FF2B5EF4-FFF2-40B4-BE49-F238E27FC236}">
-                <a16:creationId xmlns:a16="http://schemas.microsoft.com/office/drawing/2014/main" id="{593FB273-D001-41D7-8857-A299369DFBE7}"/>
+                <a16:creationId xmlns:a16="http://schemas.microsoft.com/office/drawing/2014/main" id="{52AF6963-8943-4361-868A-942F0E800520}"/>
               </a:ext>
             </a:extLst>
           </p:cNvPr>
@@ -3935,7 +3935,7 @@
           <p:cNvPr id="14" name="">
             <a:extLst xmlns:a="http://schemas.openxmlformats.org/drawingml/2006/main">
               <a:ext uri="{FF2B5EF4-FFF2-40B4-BE49-F238E27FC236}">
-                <a16:creationId xmlns:a16="http://schemas.microsoft.com/office/drawing/2014/main" id="{7BD47EFD-1401-400D-80AD-2CDC6B6D4486}"/>
+                <a16:creationId xmlns:a16="http://schemas.microsoft.com/office/drawing/2014/main" id="{DF7DB0DC-AAF0-467A-87A8-FA64D6F8F81D}"/>
               </a:ext>
             </a:extLst>
           </p:cNvPr>
@@ -3992,7 +3992,7 @@
           <p:cNvPr id="15" name="">
             <a:extLst xmlns:a="http://schemas.openxmlformats.org/drawingml/2006/main">
               <a:ext uri="{FF2B5EF4-FFF2-40B4-BE49-F238E27FC236}">
-                <a16:creationId xmlns:a16="http://schemas.microsoft.com/office/drawing/2014/main" id="{54396FC7-B355-4DE6-B8DB-1E34E8B8EC3A}"/>
+                <a16:creationId xmlns:a16="http://schemas.microsoft.com/office/drawing/2014/main" id="{59F56206-3987-422D-AE28-BC7DEF2D985E}"/>
               </a:ext>
             </a:extLst>
           </p:cNvPr>
@@ -4026,7 +4026,7 @@
           <p:cNvPr id="16" name="">
             <a:extLst xmlns:a="http://schemas.openxmlformats.org/drawingml/2006/main">
               <a:ext uri="{FF2B5EF4-FFF2-40B4-BE49-F238E27FC236}">
-                <a16:creationId xmlns:a16="http://schemas.microsoft.com/office/drawing/2014/main" id="{612BF903-C12B-40F3-AC8B-29FC4656C9AE}"/>
+                <a16:creationId xmlns:a16="http://schemas.microsoft.com/office/drawing/2014/main" id="{C6B98962-6528-42F6-993F-1DA99269F3C2}"/>
               </a:ext>
             </a:extLst>
           </p:cNvPr>
@@ -4083,7 +4083,7 @@
           <p:cNvPr id="17" name="">
             <a:extLst xmlns:a="http://schemas.openxmlformats.org/drawingml/2006/main">
               <a:ext uri="{FF2B5EF4-FFF2-40B4-BE49-F238E27FC236}">
-                <a16:creationId xmlns:a16="http://schemas.microsoft.com/office/drawing/2014/main" id="{803DE42A-1823-4608-87D9-D0F04FB322CA}"/>
+                <a16:creationId xmlns:a16="http://schemas.microsoft.com/office/drawing/2014/main" id="{28AA9C69-99D5-466C-984A-0049873ABBAF}"/>
               </a:ext>
             </a:extLst>
           </p:cNvPr>
@@ -4140,7 +4140,7 @@
           <p:cNvPr id="18" name="">
             <a:extLst xmlns:a="http://schemas.openxmlformats.org/drawingml/2006/main">
               <a:ext uri="{FF2B5EF4-FFF2-40B4-BE49-F238E27FC236}">
-                <a16:creationId xmlns:a16="http://schemas.microsoft.com/office/drawing/2014/main" id="{D2A01069-4717-49BB-BC03-262FE6E4555E}"/>
+                <a16:creationId xmlns:a16="http://schemas.microsoft.com/office/drawing/2014/main" id="{FE281D1E-B3F0-4850-8F95-2B4D36AD72EB}"/>
               </a:ext>
             </a:extLst>
           </p:cNvPr>
@@ -4195,7 +4195,7 @@
     </p:spTree>
     <p:extLst>
       <p:ext uri="{BB962C8B-B14F-4D97-AF65-F5344CB8AC3E}">
-        <p14:creationId xmlns:p14="http://schemas.microsoft.com/office/powerpoint/2010/main" val="865764049"/>
+        <p14:creationId xmlns:p14="http://schemas.microsoft.com/office/powerpoint/2010/main" val="566910357"/>
       </p:ext>
     </p:extLst>
   </p:cSld>
@@ -4350,7 +4350,7 @@
           <p:cNvPr id="23" name="">
             <a:extLst xmlns:a="http://schemas.openxmlformats.org/drawingml/2006/main">
               <a:ext uri="{FF2B5EF4-FFF2-40B4-BE49-F238E27FC236}">
-                <a16:creationId xmlns:a16="http://schemas.microsoft.com/office/drawing/2014/main" id="{4359BF87-4805-41C1-9BFD-8D7832E0B568}"/>
+                <a16:creationId xmlns:a16="http://schemas.microsoft.com/office/drawing/2014/main" id="{19E546A6-F0BB-41CB-93A4-408224F23810}"/>
               </a:ext>
             </a:extLst>
           </p:cNvPr>
@@ -4382,7 +4382,7 @@
           <p:cNvPr id="2" name="">
             <a:extLst xmlns:a="http://schemas.openxmlformats.org/drawingml/2006/main">
               <a:ext uri="{FF2B5EF4-FFF2-40B4-BE49-F238E27FC236}">
-                <a16:creationId xmlns:a16="http://schemas.microsoft.com/office/drawing/2014/main" id="{9AB541D4-E907-422E-AE45-32B4905CBBAF}"/>
+                <a16:creationId xmlns:a16="http://schemas.microsoft.com/office/drawing/2014/main" id="{042DEB4A-A695-4038-91FB-404E2B4A0696}"/>
               </a:ext>
             </a:extLst>
           </p:cNvPr>
@@ -4439,7 +4439,7 @@
           <p:cNvPr id="3" name="">
             <a:extLst xmlns:a="http://schemas.openxmlformats.org/drawingml/2006/main">
               <a:ext uri="{FF2B5EF4-FFF2-40B4-BE49-F238E27FC236}">
-                <a16:creationId xmlns:a16="http://schemas.microsoft.com/office/drawing/2014/main" id="{1DA5A9D6-FF5B-4618-94B1-D0DB2CB29415}"/>
+                <a16:creationId xmlns:a16="http://schemas.microsoft.com/office/drawing/2014/main" id="{5CC98FF3-DF08-4883-87D3-0BA1FDA44504}"/>
               </a:ext>
             </a:extLst>
           </p:cNvPr>
@@ -4471,7 +4471,7 @@
           <p:cNvPr id="4" name="">
             <a:extLst xmlns:a="http://schemas.openxmlformats.org/drawingml/2006/main">
               <a:ext uri="{FF2B5EF4-FFF2-40B4-BE49-F238E27FC236}">
-                <a16:creationId xmlns:a16="http://schemas.microsoft.com/office/drawing/2014/main" id="{FE347C53-43B3-4CC2-B765-FCF1450864B6}"/>
+                <a16:creationId xmlns:a16="http://schemas.microsoft.com/office/drawing/2014/main" id="{10F980AC-E962-497B-AF0A-687B7FCC1A70}"/>
               </a:ext>
             </a:extLst>
           </p:cNvPr>
@@ -4528,7 +4528,7 @@
           <p:cNvPr id="5" name="">
             <a:extLst xmlns:a="http://schemas.openxmlformats.org/drawingml/2006/main">
               <a:ext uri="{FF2B5EF4-FFF2-40B4-BE49-F238E27FC236}">
-                <a16:creationId xmlns:a16="http://schemas.microsoft.com/office/drawing/2014/main" id="{B2FA8170-BBD3-4341-A936-AEDC746E70F3}"/>
+                <a16:creationId xmlns:a16="http://schemas.microsoft.com/office/drawing/2014/main" id="{C9C39965-CDD4-4DE0-9EA2-5AD4224EA44D}"/>
               </a:ext>
             </a:extLst>
           </p:cNvPr>
@@ -4585,7 +4585,7 @@
           <p:cNvPr id="6" name="">
             <a:extLst xmlns:a="http://schemas.openxmlformats.org/drawingml/2006/main">
               <a:ext uri="{FF2B5EF4-FFF2-40B4-BE49-F238E27FC236}">
-                <a16:creationId xmlns:a16="http://schemas.microsoft.com/office/drawing/2014/main" id="{F6905D73-1818-46A5-9DBC-63B19CF40C3A}"/>
+                <a16:creationId xmlns:a16="http://schemas.microsoft.com/office/drawing/2014/main" id="{2F17486A-7A2E-48F1-9314-14866D838B4B}"/>
               </a:ext>
             </a:extLst>
           </p:cNvPr>
@@ -4642,7 +4642,7 @@
           <p:cNvPr id="7" name="">
             <a:extLst xmlns:a="http://schemas.openxmlformats.org/drawingml/2006/main">
               <a:ext uri="{FF2B5EF4-FFF2-40B4-BE49-F238E27FC236}">
-                <a16:creationId xmlns:a16="http://schemas.microsoft.com/office/drawing/2014/main" id="{1E186E2B-5AAE-410C-8EB8-FF47A7AD7DBE}"/>
+                <a16:creationId xmlns:a16="http://schemas.microsoft.com/office/drawing/2014/main" id="{3D971069-2040-43AE-BB0C-84EC2F85D677}"/>
               </a:ext>
             </a:extLst>
           </p:cNvPr>
@@ -4674,7 +4674,7 @@
           <p:cNvPr id="8" name="">
             <a:extLst xmlns:a="http://schemas.openxmlformats.org/drawingml/2006/main">
               <a:ext uri="{FF2B5EF4-FFF2-40B4-BE49-F238E27FC236}">
-                <a16:creationId xmlns:a16="http://schemas.microsoft.com/office/drawing/2014/main" id="{17E13C34-9CC1-4720-97E2-B27F537AC225}"/>
+                <a16:creationId xmlns:a16="http://schemas.microsoft.com/office/drawing/2014/main" id="{7A677296-8FF9-4EE5-BD44-B1E18E95ACBB}"/>
               </a:ext>
             </a:extLst>
           </p:cNvPr>
@@ -4731,7 +4731,7 @@
           <p:cNvPr id="9" name="">
             <a:extLst xmlns:a="http://schemas.openxmlformats.org/drawingml/2006/main">
               <a:ext uri="{FF2B5EF4-FFF2-40B4-BE49-F238E27FC236}">
-                <a16:creationId xmlns:a16="http://schemas.microsoft.com/office/drawing/2014/main" id="{8B6AAF78-B9CF-4D7E-A0CD-3641C71D03AB}"/>
+                <a16:creationId xmlns:a16="http://schemas.microsoft.com/office/drawing/2014/main" id="{6278DE1F-8838-49DE-BD92-A853EA7C83C9}"/>
               </a:ext>
             </a:extLst>
           </p:cNvPr>
@@ -4788,7 +4788,7 @@
           <p:cNvPr id="10" name="">
             <a:extLst xmlns:a="http://schemas.openxmlformats.org/drawingml/2006/main">
               <a:ext uri="{FF2B5EF4-FFF2-40B4-BE49-F238E27FC236}">
-                <a16:creationId xmlns:a16="http://schemas.microsoft.com/office/drawing/2014/main" id="{61347593-231D-4041-AFE9-9547B6B2075D}"/>
+                <a16:creationId xmlns:a16="http://schemas.microsoft.com/office/drawing/2014/main" id="{05B80973-2D45-4E53-ADEC-BDA123FEC36D}"/>
               </a:ext>
             </a:extLst>
           </p:cNvPr>
@@ -4822,7 +4822,7 @@
           <p:cNvPr id="11" name="">
             <a:extLst xmlns:a="http://schemas.openxmlformats.org/drawingml/2006/main">
               <a:ext uri="{FF2B5EF4-FFF2-40B4-BE49-F238E27FC236}">
-                <a16:creationId xmlns:a16="http://schemas.microsoft.com/office/drawing/2014/main" id="{78B0DFC7-AE2B-4C74-B315-BB6DF3713022}"/>
+                <a16:creationId xmlns:a16="http://schemas.microsoft.com/office/drawing/2014/main" id="{22C57F83-9F92-4538-A5F5-85B54BEA04D7}"/>
               </a:ext>
             </a:extLst>
           </p:cNvPr>
@@ -4854,7 +4854,7 @@
           <p:cNvPr id="12" name="">
             <a:extLst xmlns:a="http://schemas.openxmlformats.org/drawingml/2006/main">
               <a:ext uri="{FF2B5EF4-FFF2-40B4-BE49-F238E27FC236}">
-                <a16:creationId xmlns:a16="http://schemas.microsoft.com/office/drawing/2014/main" id="{9C871C02-AA95-4EDB-A6E3-CF74A32F2397}"/>
+                <a16:creationId xmlns:a16="http://schemas.microsoft.com/office/drawing/2014/main" id="{C14DBC6F-7B84-4ED8-9F78-0D5469A8871E}"/>
               </a:ext>
             </a:extLst>
           </p:cNvPr>
@@ -4911,7 +4911,7 @@
           <p:cNvPr id="13" name="">
             <a:extLst xmlns:a="http://schemas.openxmlformats.org/drawingml/2006/main">
               <a:ext uri="{FF2B5EF4-FFF2-40B4-BE49-F238E27FC236}">
-                <a16:creationId xmlns:a16="http://schemas.microsoft.com/office/drawing/2014/main" id="{4028734A-9CE4-4C27-B046-EE8F726D38F6}"/>
+                <a16:creationId xmlns:a16="http://schemas.microsoft.com/office/drawing/2014/main" id="{B02BB962-6A50-4DB6-8671-6ED9699D660B}"/>
               </a:ext>
             </a:extLst>
           </p:cNvPr>
@@ -4968,7 +4968,7 @@
           <p:cNvPr id="14" name="">
             <a:extLst xmlns:a="http://schemas.openxmlformats.org/drawingml/2006/main">
               <a:ext uri="{FF2B5EF4-FFF2-40B4-BE49-F238E27FC236}">
-                <a16:creationId xmlns:a16="http://schemas.microsoft.com/office/drawing/2014/main" id="{06766076-0AB7-49C3-A969-8D9D0F06105C}"/>
+                <a16:creationId xmlns:a16="http://schemas.microsoft.com/office/drawing/2014/main" id="{A6E3AAE6-EABD-42B7-818F-75E447F1872F}"/>
               </a:ext>
             </a:extLst>
           </p:cNvPr>
@@ -5002,7 +5002,7 @@
           <p:cNvPr id="15" name="">
             <a:extLst xmlns:a="http://schemas.openxmlformats.org/drawingml/2006/main">
               <a:ext uri="{FF2B5EF4-FFF2-40B4-BE49-F238E27FC236}">
-                <a16:creationId xmlns:a16="http://schemas.microsoft.com/office/drawing/2014/main" id="{F47C219E-B35C-477B-8746-CC9C273F095D}"/>
+                <a16:creationId xmlns:a16="http://schemas.microsoft.com/office/drawing/2014/main" id="{00F632A4-7D66-404F-BBE2-F2662515D793}"/>
               </a:ext>
             </a:extLst>
           </p:cNvPr>
@@ -5034,7 +5034,7 @@
           <p:cNvPr id="16" name="">
             <a:extLst xmlns:a="http://schemas.openxmlformats.org/drawingml/2006/main">
               <a:ext uri="{FF2B5EF4-FFF2-40B4-BE49-F238E27FC236}">
-                <a16:creationId xmlns:a16="http://schemas.microsoft.com/office/drawing/2014/main" id="{17AA396D-8597-4AF2-B239-19179700E7B3}"/>
+                <a16:creationId xmlns:a16="http://schemas.microsoft.com/office/drawing/2014/main" id="{F15AEF95-C281-46A4-90AB-F71144265A58}"/>
               </a:ext>
             </a:extLst>
           </p:cNvPr>
@@ -5091,7 +5091,7 @@
           <p:cNvPr id="17" name="">
             <a:extLst xmlns:a="http://schemas.openxmlformats.org/drawingml/2006/main">
               <a:ext uri="{FF2B5EF4-FFF2-40B4-BE49-F238E27FC236}">
-                <a16:creationId xmlns:a16="http://schemas.microsoft.com/office/drawing/2014/main" id="{72EE5891-B881-42FB-B1E0-9636A1D03881}"/>
+                <a16:creationId xmlns:a16="http://schemas.microsoft.com/office/drawing/2014/main" id="{0E845331-980C-47CC-BA25-D4AB29785627}"/>
               </a:ext>
             </a:extLst>
           </p:cNvPr>
@@ -5148,7 +5148,7 @@
           <p:cNvPr id="18" name="">
             <a:extLst xmlns:a="http://schemas.openxmlformats.org/drawingml/2006/main">
               <a:ext uri="{FF2B5EF4-FFF2-40B4-BE49-F238E27FC236}">
-                <a16:creationId xmlns:a16="http://schemas.microsoft.com/office/drawing/2014/main" id="{DC1D2934-779B-4FCC-B5FA-75B60C31A109}"/>
+                <a16:creationId xmlns:a16="http://schemas.microsoft.com/office/drawing/2014/main" id="{8CFFD9F5-461C-4A77-AA68-7D53AC33EB9B}"/>
               </a:ext>
             </a:extLst>
           </p:cNvPr>
@@ -5182,7 +5182,7 @@
           <p:cNvPr id="19" name="">
             <a:extLst xmlns:a="http://schemas.openxmlformats.org/drawingml/2006/main">
               <a:ext uri="{FF2B5EF4-FFF2-40B4-BE49-F238E27FC236}">
-                <a16:creationId xmlns:a16="http://schemas.microsoft.com/office/drawing/2014/main" id="{22F420EB-A036-4444-9CAD-3C814186A5A6}"/>
+                <a16:creationId xmlns:a16="http://schemas.microsoft.com/office/drawing/2014/main" id="{5F93FB25-02AD-4CC0-BC25-551459B833EF}"/>
               </a:ext>
             </a:extLst>
           </p:cNvPr>
@@ -5214,7 +5214,7 @@
           <p:cNvPr id="20" name="">
             <a:extLst xmlns:a="http://schemas.openxmlformats.org/drawingml/2006/main">
               <a:ext uri="{FF2B5EF4-FFF2-40B4-BE49-F238E27FC236}">
-                <a16:creationId xmlns:a16="http://schemas.microsoft.com/office/drawing/2014/main" id="{5EBFE2B4-4EA7-459D-906E-8A82ED789407}"/>
+                <a16:creationId xmlns:a16="http://schemas.microsoft.com/office/drawing/2014/main" id="{25030329-8B1F-4B1A-8894-8C46CAA8172E}"/>
               </a:ext>
             </a:extLst>
           </p:cNvPr>
@@ -5271,7 +5271,7 @@
           <p:cNvPr id="21" name="">
             <a:extLst xmlns:a="http://schemas.openxmlformats.org/drawingml/2006/main">
               <a:ext uri="{FF2B5EF4-FFF2-40B4-BE49-F238E27FC236}">
-                <a16:creationId xmlns:a16="http://schemas.microsoft.com/office/drawing/2014/main" id="{FC27A9E5-6193-4DFB-A052-A5DB6901E68F}"/>
+                <a16:creationId xmlns:a16="http://schemas.microsoft.com/office/drawing/2014/main" id="{853E9525-BBA1-4002-9D4C-639E5513E23F}"/>
               </a:ext>
             </a:extLst>
           </p:cNvPr>
@@ -5328,7 +5328,7 @@
           <p:cNvPr id="22" name="">
             <a:extLst xmlns:a="http://schemas.openxmlformats.org/drawingml/2006/main">
               <a:ext uri="{FF2B5EF4-FFF2-40B4-BE49-F238E27FC236}">
-                <a16:creationId xmlns:a16="http://schemas.microsoft.com/office/drawing/2014/main" id="{110CAE8F-0A71-4F5A-957A-A2F8DEB07A1B}"/>
+                <a16:creationId xmlns:a16="http://schemas.microsoft.com/office/drawing/2014/main" id="{FD2C4F32-B161-4DF2-B0C8-DF15DADE2BC6}"/>
               </a:ext>
             </a:extLst>
           </p:cNvPr>
@@ -5383,7 +5383,7 @@
     </p:spTree>
     <p:extLst>
       <p:ext uri="{BB962C8B-B14F-4D97-AF65-F5344CB8AC3E}">
-        <p14:creationId xmlns:p14="http://schemas.microsoft.com/office/powerpoint/2010/main" val="1023639596"/>
+        <p14:creationId xmlns:p14="http://schemas.microsoft.com/office/powerpoint/2010/main" val="1984684422"/>
       </p:ext>
     </p:extLst>
   </p:cSld>
@@ -5584,7 +5584,7 @@
           <p:cNvPr id="23" name="">
             <a:extLst xmlns:a="http://schemas.openxmlformats.org/drawingml/2006/main">
               <a:ext uri="{FF2B5EF4-FFF2-40B4-BE49-F238E27FC236}">
-                <a16:creationId xmlns:a16="http://schemas.microsoft.com/office/drawing/2014/main" id="{63635527-316A-4E85-9702-7C22D70BD3D7}"/>
+                <a16:creationId xmlns:a16="http://schemas.microsoft.com/office/drawing/2014/main" id="{5BC84D4F-EEB8-410E-A531-F621ED972FAD}"/>
               </a:ext>
             </a:extLst>
           </p:cNvPr>
@@ -5616,7 +5616,7 @@
           <p:cNvPr id="2" name="">
             <a:extLst xmlns:a="http://schemas.openxmlformats.org/drawingml/2006/main">
               <a:ext uri="{FF2B5EF4-FFF2-40B4-BE49-F238E27FC236}">
-                <a16:creationId xmlns:a16="http://schemas.microsoft.com/office/drawing/2014/main" id="{6B2D41E2-7F81-432F-BF44-A021DECCBB8F}"/>
+                <a16:creationId xmlns:a16="http://schemas.microsoft.com/office/drawing/2014/main" id="{528E9F66-5DAF-44DD-A14B-176024FB7666}"/>
               </a:ext>
             </a:extLst>
           </p:cNvPr>
@@ -5673,7 +5673,7 @@
           <p:cNvPr id="3" name="">
             <a:extLst xmlns:a="http://schemas.openxmlformats.org/drawingml/2006/main">
               <a:ext uri="{FF2B5EF4-FFF2-40B4-BE49-F238E27FC236}">
-                <a16:creationId xmlns:a16="http://schemas.microsoft.com/office/drawing/2014/main" id="{1845C5A3-101F-4E40-AA55-CB075F71715A}"/>
+                <a16:creationId xmlns:a16="http://schemas.microsoft.com/office/drawing/2014/main" id="{C6C6EF87-AF53-4399-82EF-2AC998FF4D49}"/>
               </a:ext>
             </a:extLst>
           </p:cNvPr>
@@ -5705,7 +5705,7 @@
           <p:cNvPr id="4" name="">
             <a:extLst xmlns:a="http://schemas.openxmlformats.org/drawingml/2006/main">
               <a:ext uri="{FF2B5EF4-FFF2-40B4-BE49-F238E27FC236}">
-                <a16:creationId xmlns:a16="http://schemas.microsoft.com/office/drawing/2014/main" id="{2938D76A-6FF8-46CC-912F-88C763C324F4}"/>
+                <a16:creationId xmlns:a16="http://schemas.microsoft.com/office/drawing/2014/main" id="{5DDEFB00-F7EB-4868-93B7-728DE178471C}"/>
               </a:ext>
             </a:extLst>
           </p:cNvPr>
@@ -5762,7 +5762,7 @@
           <p:cNvPr id="5" name="">
             <a:extLst xmlns:a="http://schemas.openxmlformats.org/drawingml/2006/main">
               <a:ext uri="{FF2B5EF4-FFF2-40B4-BE49-F238E27FC236}">
-                <a16:creationId xmlns:a16="http://schemas.microsoft.com/office/drawing/2014/main" id="{63ADA4B2-1B1D-4029-AD7D-D2E6A4D6A438}"/>
+                <a16:creationId xmlns:a16="http://schemas.microsoft.com/office/drawing/2014/main" id="{9A9F4E24-6327-4CAA-9F37-2FC05ABA3C59}"/>
               </a:ext>
             </a:extLst>
           </p:cNvPr>
@@ -5819,7 +5819,7 @@
           <p:cNvPr id="6" name="">
             <a:extLst xmlns:a="http://schemas.openxmlformats.org/drawingml/2006/main">
               <a:ext uri="{FF2B5EF4-FFF2-40B4-BE49-F238E27FC236}">
-                <a16:creationId xmlns:a16="http://schemas.microsoft.com/office/drawing/2014/main" id="{C9068750-00D0-4BB9-AF1B-6D811C33A457}"/>
+                <a16:creationId xmlns:a16="http://schemas.microsoft.com/office/drawing/2014/main" id="{C2186785-13C1-4E27-9750-50B0350F4954}"/>
               </a:ext>
             </a:extLst>
           </p:cNvPr>
@@ -5876,7 +5876,7 @@
           <p:cNvPr id="7" name="">
             <a:extLst xmlns:a="http://schemas.openxmlformats.org/drawingml/2006/main">
               <a:ext uri="{FF2B5EF4-FFF2-40B4-BE49-F238E27FC236}">
-                <a16:creationId xmlns:a16="http://schemas.microsoft.com/office/drawing/2014/main" id="{60B9DEB6-D4E3-4432-B529-9DFA71A6E57A}"/>
+                <a16:creationId xmlns:a16="http://schemas.microsoft.com/office/drawing/2014/main" id="{91AF0157-2B83-4F35-A364-C4BCC41D4115}"/>
               </a:ext>
             </a:extLst>
           </p:cNvPr>
@@ -5908,7 +5908,7 @@
           <p:cNvPr id="8" name="">
             <a:extLst xmlns:a="http://schemas.openxmlformats.org/drawingml/2006/main">
               <a:ext uri="{FF2B5EF4-FFF2-40B4-BE49-F238E27FC236}">
-                <a16:creationId xmlns:a16="http://schemas.microsoft.com/office/drawing/2014/main" id="{0430A951-4F51-465F-824C-A9C51FA6F8E7}"/>
+                <a16:creationId xmlns:a16="http://schemas.microsoft.com/office/drawing/2014/main" id="{C64967A2-2F5F-4223-B3FB-A57D1B147A82}"/>
               </a:ext>
             </a:extLst>
           </p:cNvPr>
@@ -5965,7 +5965,7 @@
           <p:cNvPr id="9" name="">
             <a:extLst xmlns:a="http://schemas.openxmlformats.org/drawingml/2006/main">
               <a:ext uri="{FF2B5EF4-FFF2-40B4-BE49-F238E27FC236}">
-                <a16:creationId xmlns:a16="http://schemas.microsoft.com/office/drawing/2014/main" id="{A021403E-7308-4D3A-B0E3-C517BA1E3DC8}"/>
+                <a16:creationId xmlns:a16="http://schemas.microsoft.com/office/drawing/2014/main" id="{33E5B7A6-9004-417A-82CA-0343DAD205A7}"/>
               </a:ext>
             </a:extLst>
           </p:cNvPr>
@@ -6022,7 +6022,7 @@
           <p:cNvPr id="10" name="">
             <a:extLst xmlns:a="http://schemas.openxmlformats.org/drawingml/2006/main">
               <a:ext uri="{FF2B5EF4-FFF2-40B4-BE49-F238E27FC236}">
-                <a16:creationId xmlns:a16="http://schemas.microsoft.com/office/drawing/2014/main" id="{BEB9C058-1D5B-4713-A567-5C0AA64EE13F}"/>
+                <a16:creationId xmlns:a16="http://schemas.microsoft.com/office/drawing/2014/main" id="{A3A6D69E-B0F4-445A-96DD-7AD811B66065}"/>
               </a:ext>
             </a:extLst>
           </p:cNvPr>
@@ -6056,7 +6056,7 @@
           <p:cNvPr id="11" name="">
             <a:extLst xmlns:a="http://schemas.openxmlformats.org/drawingml/2006/main">
               <a:ext uri="{FF2B5EF4-FFF2-40B4-BE49-F238E27FC236}">
-                <a16:creationId xmlns:a16="http://schemas.microsoft.com/office/drawing/2014/main" id="{204CF777-1633-4778-A4E5-11A231A11E6D}"/>
+                <a16:creationId xmlns:a16="http://schemas.microsoft.com/office/drawing/2014/main" id="{9BCAD39E-07CC-4D98-B36D-0702E3366E9C}"/>
               </a:ext>
             </a:extLst>
           </p:cNvPr>
@@ -6088,7 +6088,7 @@
           <p:cNvPr id="12" name="">
             <a:extLst xmlns:a="http://schemas.openxmlformats.org/drawingml/2006/main">
               <a:ext uri="{FF2B5EF4-FFF2-40B4-BE49-F238E27FC236}">
-                <a16:creationId xmlns:a16="http://schemas.microsoft.com/office/drawing/2014/main" id="{A5E6D4C6-DF52-421B-AFF2-7D749EF62AA1}"/>
+                <a16:creationId xmlns:a16="http://schemas.microsoft.com/office/drawing/2014/main" id="{904E1342-B014-426A-998E-5413BFDB32CA}"/>
               </a:ext>
             </a:extLst>
           </p:cNvPr>
@@ -6145,7 +6145,7 @@
           <p:cNvPr id="13" name="">
             <a:extLst xmlns:a="http://schemas.openxmlformats.org/drawingml/2006/main">
               <a:ext uri="{FF2B5EF4-FFF2-40B4-BE49-F238E27FC236}">
-                <a16:creationId xmlns:a16="http://schemas.microsoft.com/office/drawing/2014/main" id="{1B3BE6E6-547F-4741-BC47-EBA8F5A67705}"/>
+                <a16:creationId xmlns:a16="http://schemas.microsoft.com/office/drawing/2014/main" id="{0A20DB60-EE0C-4131-AD74-525A4B4ED374}"/>
               </a:ext>
             </a:extLst>
           </p:cNvPr>
@@ -6202,7 +6202,7 @@
           <p:cNvPr id="14" name="">
             <a:extLst xmlns:a="http://schemas.openxmlformats.org/drawingml/2006/main">
               <a:ext uri="{FF2B5EF4-FFF2-40B4-BE49-F238E27FC236}">
-                <a16:creationId xmlns:a16="http://schemas.microsoft.com/office/drawing/2014/main" id="{EE4C2292-6312-4490-9A31-99D16B107552}"/>
+                <a16:creationId xmlns:a16="http://schemas.microsoft.com/office/drawing/2014/main" id="{8DF7A71C-A128-48DB-8F84-F61FDAAA6180}"/>
               </a:ext>
             </a:extLst>
           </p:cNvPr>
@@ -6236,7 +6236,7 @@
           <p:cNvPr id="15" name="">
             <a:extLst xmlns:a="http://schemas.openxmlformats.org/drawingml/2006/main">
               <a:ext uri="{FF2B5EF4-FFF2-40B4-BE49-F238E27FC236}">
-                <a16:creationId xmlns:a16="http://schemas.microsoft.com/office/drawing/2014/main" id="{BC130464-22C4-4273-86C7-DFBA8051E231}"/>
+                <a16:creationId xmlns:a16="http://schemas.microsoft.com/office/drawing/2014/main" id="{773BFD75-6E10-40D9-B685-A361E7AA5F41}"/>
               </a:ext>
             </a:extLst>
           </p:cNvPr>
@@ -6268,7 +6268,7 @@
           <p:cNvPr id="16" name="">
             <a:extLst xmlns:a="http://schemas.openxmlformats.org/drawingml/2006/main">
               <a:ext uri="{FF2B5EF4-FFF2-40B4-BE49-F238E27FC236}">
-                <a16:creationId xmlns:a16="http://schemas.microsoft.com/office/drawing/2014/main" id="{69D738F2-15BA-42DE-8D09-256F84A3D0C5}"/>
+                <a16:creationId xmlns:a16="http://schemas.microsoft.com/office/drawing/2014/main" id="{09BE4045-748D-41EA-8E1A-CD30EEEEA36A}"/>
               </a:ext>
             </a:extLst>
           </p:cNvPr>
@@ -6325,7 +6325,7 @@
           <p:cNvPr id="17" name="">
             <a:extLst xmlns:a="http://schemas.openxmlformats.org/drawingml/2006/main">
               <a:ext uri="{FF2B5EF4-FFF2-40B4-BE49-F238E27FC236}">
-                <a16:creationId xmlns:a16="http://schemas.microsoft.com/office/drawing/2014/main" id="{DA94937A-2ACD-4B9F-B493-8F8359BF8568}"/>
+                <a16:creationId xmlns:a16="http://schemas.microsoft.com/office/drawing/2014/main" id="{3F69E7DC-81CD-46A7-8BF9-FDCE7C63BC3C}"/>
               </a:ext>
             </a:extLst>
           </p:cNvPr>
@@ -6382,7 +6382,7 @@
           <p:cNvPr id="18" name="">
             <a:extLst xmlns:a="http://schemas.openxmlformats.org/drawingml/2006/main">
               <a:ext uri="{FF2B5EF4-FFF2-40B4-BE49-F238E27FC236}">
-                <a16:creationId xmlns:a16="http://schemas.microsoft.com/office/drawing/2014/main" id="{C195FE76-4F6F-4A51-898D-4216C548F44F}"/>
+                <a16:creationId xmlns:a16="http://schemas.microsoft.com/office/drawing/2014/main" id="{C882CF59-9FEE-4483-AA71-76A022CF9B47}"/>
               </a:ext>
             </a:extLst>
           </p:cNvPr>
@@ -6416,7 +6416,7 @@
           <p:cNvPr id="19" name="">
             <a:extLst xmlns:a="http://schemas.openxmlformats.org/drawingml/2006/main">
               <a:ext uri="{FF2B5EF4-FFF2-40B4-BE49-F238E27FC236}">
-                <a16:creationId xmlns:a16="http://schemas.microsoft.com/office/drawing/2014/main" id="{FE0D1744-189F-4B90-9E3B-7129DC522D81}"/>
+                <a16:creationId xmlns:a16="http://schemas.microsoft.com/office/drawing/2014/main" id="{96D4D3EB-6F79-4EB7-B923-52515EACF094}"/>
               </a:ext>
             </a:extLst>
           </p:cNvPr>
@@ -6448,7 +6448,7 @@
           <p:cNvPr id="20" name="">
             <a:extLst xmlns:a="http://schemas.openxmlformats.org/drawingml/2006/main">
               <a:ext uri="{FF2B5EF4-FFF2-40B4-BE49-F238E27FC236}">
-                <a16:creationId xmlns:a16="http://schemas.microsoft.com/office/drawing/2014/main" id="{3CADC709-048A-4F95-A330-86F61C705202}"/>
+                <a16:creationId xmlns:a16="http://schemas.microsoft.com/office/drawing/2014/main" id="{05DCE55E-832C-4AEC-9DE5-5AA755C0234A}"/>
               </a:ext>
             </a:extLst>
           </p:cNvPr>
@@ -6505,7 +6505,7 @@
           <p:cNvPr id="21" name="">
             <a:extLst xmlns:a="http://schemas.openxmlformats.org/drawingml/2006/main">
               <a:ext uri="{FF2B5EF4-FFF2-40B4-BE49-F238E27FC236}">
-                <a16:creationId xmlns:a16="http://schemas.microsoft.com/office/drawing/2014/main" id="{77C39B50-C1CF-451F-8B1A-86C618740140}"/>
+                <a16:creationId xmlns:a16="http://schemas.microsoft.com/office/drawing/2014/main" id="{C80A6F46-F9B9-4D38-B8F3-B5DBD925E161}"/>
               </a:ext>
             </a:extLst>
           </p:cNvPr>
@@ -6562,7 +6562,7 @@
           <p:cNvPr id="22" name="">
             <a:extLst xmlns:a="http://schemas.openxmlformats.org/drawingml/2006/main">
               <a:ext uri="{FF2B5EF4-FFF2-40B4-BE49-F238E27FC236}">
-                <a16:creationId xmlns:a16="http://schemas.microsoft.com/office/drawing/2014/main" id="{D705EF6C-310D-4DB3-89D5-1E8EB2422215}"/>
+                <a16:creationId xmlns:a16="http://schemas.microsoft.com/office/drawing/2014/main" id="{9EFE8DD6-8E36-478A-A34E-325F64A592BF}"/>
               </a:ext>
             </a:extLst>
           </p:cNvPr>
@@ -6617,7 +6617,7 @@
     </p:spTree>
     <p:extLst>
       <p:ext uri="{BB962C8B-B14F-4D97-AF65-F5344CB8AC3E}">
-        <p14:creationId xmlns:p14="http://schemas.microsoft.com/office/powerpoint/2010/main" val="903621077"/>
+        <p14:creationId xmlns:p14="http://schemas.microsoft.com/office/powerpoint/2010/main" val="2103048209"/>
       </p:ext>
     </p:extLst>
   </p:cSld>
@@ -6818,7 +6818,7 @@
           <p:cNvPr id="16" name="">
             <a:extLst xmlns:a="http://schemas.openxmlformats.org/drawingml/2006/main">
               <a:ext uri="{FF2B5EF4-FFF2-40B4-BE49-F238E27FC236}">
-                <a16:creationId xmlns:a16="http://schemas.microsoft.com/office/drawing/2014/main" id="{E602947B-FA91-4693-A6F7-7D60D7A92A69}"/>
+                <a16:creationId xmlns:a16="http://schemas.microsoft.com/office/drawing/2014/main" id="{B506D5B5-5E42-4586-88B7-D5EB993CF818}"/>
               </a:ext>
             </a:extLst>
           </p:cNvPr>
@@ -6850,7 +6850,7 @@
           <p:cNvPr id="2" name="">
             <a:extLst xmlns:a="http://schemas.openxmlformats.org/drawingml/2006/main">
               <a:ext uri="{FF2B5EF4-FFF2-40B4-BE49-F238E27FC236}">
-                <a16:creationId xmlns:a16="http://schemas.microsoft.com/office/drawing/2014/main" id="{221F569E-08FD-4D09-BB36-F535B5490C0C}"/>
+                <a16:creationId xmlns:a16="http://schemas.microsoft.com/office/drawing/2014/main" id="{29B567A1-EFE9-45FA-BA81-AF918D5DDA34}"/>
               </a:ext>
             </a:extLst>
           </p:cNvPr>
@@ -6907,7 +6907,7 @@
           <p:cNvPr id="3" name="">
             <a:extLst xmlns:a="http://schemas.openxmlformats.org/drawingml/2006/main">
               <a:ext uri="{FF2B5EF4-FFF2-40B4-BE49-F238E27FC236}">
-                <a16:creationId xmlns:a16="http://schemas.microsoft.com/office/drawing/2014/main" id="{A36D334B-3F3B-4DA0-AD7F-52AB4700EF0E}"/>
+                <a16:creationId xmlns:a16="http://schemas.microsoft.com/office/drawing/2014/main" id="{8700B7C7-200E-4B0E-B89C-E119E47266E1}"/>
               </a:ext>
             </a:extLst>
           </p:cNvPr>
@@ -6939,7 +6939,7 @@
           <p:cNvPr id="4" name="">
             <a:extLst xmlns:a="http://schemas.openxmlformats.org/drawingml/2006/main">
               <a:ext uri="{FF2B5EF4-FFF2-40B4-BE49-F238E27FC236}">
-                <a16:creationId xmlns:a16="http://schemas.microsoft.com/office/drawing/2014/main" id="{CA1EC3DC-9AB1-4029-9FEE-B2C13C3DBE6D}"/>
+                <a16:creationId xmlns:a16="http://schemas.microsoft.com/office/drawing/2014/main" id="{2EB992AF-20F5-49E8-8729-3B1BE75D3145}"/>
               </a:ext>
             </a:extLst>
           </p:cNvPr>
@@ -6996,7 +6996,7 @@
           <p:cNvPr id="5" name="">
             <a:extLst xmlns:a="http://schemas.openxmlformats.org/drawingml/2006/main">
               <a:ext uri="{FF2B5EF4-FFF2-40B4-BE49-F238E27FC236}">
-                <a16:creationId xmlns:a16="http://schemas.microsoft.com/office/drawing/2014/main" id="{C640DC1A-773D-4AB5-95F7-D7E99E359E39}"/>
+                <a16:creationId xmlns:a16="http://schemas.microsoft.com/office/drawing/2014/main" id="{030F3623-4620-4D69-8DCA-27D8BEF3324A}"/>
               </a:ext>
             </a:extLst>
           </p:cNvPr>
@@ -7053,7 +7053,7 @@
           <p:cNvPr id="6" name="">
             <a:extLst xmlns:a="http://schemas.openxmlformats.org/drawingml/2006/main">
               <a:ext uri="{FF2B5EF4-FFF2-40B4-BE49-F238E27FC236}">
-                <a16:creationId xmlns:a16="http://schemas.microsoft.com/office/drawing/2014/main" id="{5547CF70-86A7-47A1-99B0-7AAD8EC9C313}"/>
+                <a16:creationId xmlns:a16="http://schemas.microsoft.com/office/drawing/2014/main" id="{E7DEF8AB-83E0-4888-AFA1-7DA691A6ECA2}"/>
               </a:ext>
             </a:extLst>
           </p:cNvPr>
@@ -7110,7 +7110,7 @@
           <p:cNvPr id="7" name="">
             <a:extLst xmlns:a="http://schemas.openxmlformats.org/drawingml/2006/main">
               <a:ext uri="{FF2B5EF4-FFF2-40B4-BE49-F238E27FC236}">
-                <a16:creationId xmlns:a16="http://schemas.microsoft.com/office/drawing/2014/main" id="{AC588B02-F3C5-4858-8C35-3403876A7EC0}"/>
+                <a16:creationId xmlns:a16="http://schemas.microsoft.com/office/drawing/2014/main" id="{124C45FB-61F0-4007-8C3E-72401BA19F9C}"/>
               </a:ext>
             </a:extLst>
           </p:cNvPr>
@@ -7142,7 +7142,7 @@
           <p:cNvPr id="8" name="">
             <a:extLst xmlns:a="http://schemas.openxmlformats.org/drawingml/2006/main">
               <a:ext uri="{FF2B5EF4-FFF2-40B4-BE49-F238E27FC236}">
-                <a16:creationId xmlns:a16="http://schemas.microsoft.com/office/drawing/2014/main" id="{262AFCF5-B9DB-4DDD-98A1-E2CC7F0588D6}"/>
+                <a16:creationId xmlns:a16="http://schemas.microsoft.com/office/drawing/2014/main" id="{3B960C7D-67A4-4A3B-B3F9-88653C3C52CB}"/>
               </a:ext>
             </a:extLst>
           </p:cNvPr>
@@ -7199,7 +7199,7 @@
           <p:cNvPr id="9" name="">
             <a:extLst xmlns:a="http://schemas.openxmlformats.org/drawingml/2006/main">
               <a:ext uri="{FF2B5EF4-FFF2-40B4-BE49-F238E27FC236}">
-                <a16:creationId xmlns:a16="http://schemas.microsoft.com/office/drawing/2014/main" id="{79C49992-62FC-4D52-987C-39AF7A7D93B3}"/>
+                <a16:creationId xmlns:a16="http://schemas.microsoft.com/office/drawing/2014/main" id="{46501DFC-D532-4052-9882-B5C55E22579B}"/>
               </a:ext>
             </a:extLst>
           </p:cNvPr>
@@ -7256,7 +7256,7 @@
           <p:cNvPr id="10" name="">
             <a:extLst xmlns:a="http://schemas.openxmlformats.org/drawingml/2006/main">
               <a:ext uri="{FF2B5EF4-FFF2-40B4-BE49-F238E27FC236}">
-                <a16:creationId xmlns:a16="http://schemas.microsoft.com/office/drawing/2014/main" id="{E52D6D76-B3FB-4630-835B-0A1274331E1E}"/>
+                <a16:creationId xmlns:a16="http://schemas.microsoft.com/office/drawing/2014/main" id="{7284B60E-3F13-43DB-936B-AC20DCE08CAD}"/>
               </a:ext>
             </a:extLst>
           </p:cNvPr>
@@ -7313,7 +7313,7 @@
           <p:cNvPr id="11" name="">
             <a:extLst xmlns:a="http://schemas.openxmlformats.org/drawingml/2006/main">
               <a:ext uri="{FF2B5EF4-FFF2-40B4-BE49-F238E27FC236}">
-                <a16:creationId xmlns:a16="http://schemas.microsoft.com/office/drawing/2014/main" id="{83771902-7853-43A8-A590-AAF051FA3AF8}"/>
+                <a16:creationId xmlns:a16="http://schemas.microsoft.com/office/drawing/2014/main" id="{1B9FEBBE-DD97-46D0-8254-16FEE40105C6}"/>
               </a:ext>
             </a:extLst>
           </p:cNvPr>
@@ -7345,7 +7345,7 @@
           <p:cNvPr id="12" name="">
             <a:extLst xmlns:a="http://schemas.openxmlformats.org/drawingml/2006/main">
               <a:ext uri="{FF2B5EF4-FFF2-40B4-BE49-F238E27FC236}">
-                <a16:creationId xmlns:a16="http://schemas.microsoft.com/office/drawing/2014/main" id="{CFA02A32-C816-4BE4-96D9-32C4D38EDC96}"/>
+                <a16:creationId xmlns:a16="http://schemas.microsoft.com/office/drawing/2014/main" id="{11A93835-6EE1-4C5B-8EC6-E5179701018A}"/>
               </a:ext>
             </a:extLst>
           </p:cNvPr>
@@ -7402,7 +7402,7 @@
           <p:cNvPr id="13" name="">
             <a:extLst xmlns:a="http://schemas.openxmlformats.org/drawingml/2006/main">
               <a:ext uri="{FF2B5EF4-FFF2-40B4-BE49-F238E27FC236}">
-                <a16:creationId xmlns:a16="http://schemas.microsoft.com/office/drawing/2014/main" id="{E28BD8FE-9708-42C5-9E88-867738D09441}"/>
+                <a16:creationId xmlns:a16="http://schemas.microsoft.com/office/drawing/2014/main" id="{E46446A7-F328-403B-B0CB-D6B03EE0FD15}"/>
               </a:ext>
             </a:extLst>
           </p:cNvPr>
@@ -7459,7 +7459,7 @@
           <p:cNvPr id="14" name="">
             <a:extLst xmlns:a="http://schemas.openxmlformats.org/drawingml/2006/main">
               <a:ext uri="{FF2B5EF4-FFF2-40B4-BE49-F238E27FC236}">
-                <a16:creationId xmlns:a16="http://schemas.microsoft.com/office/drawing/2014/main" id="{262D0DE1-4E27-4107-8F38-8AF6676EDEEC}"/>
+                <a16:creationId xmlns:a16="http://schemas.microsoft.com/office/drawing/2014/main" id="{B33E6E22-B527-4BAC-84FB-D45CDBBD3F57}"/>
               </a:ext>
             </a:extLst>
           </p:cNvPr>
@@ -7516,7 +7516,7 @@
           <p:cNvPr id="15" name="">
             <a:extLst xmlns:a="http://schemas.openxmlformats.org/drawingml/2006/main">
               <a:ext uri="{FF2B5EF4-FFF2-40B4-BE49-F238E27FC236}">
-                <a16:creationId xmlns:a16="http://schemas.microsoft.com/office/drawing/2014/main" id="{CA96F3FD-DFFF-463C-8F4D-D36A9C70F6FB}"/>
+                <a16:creationId xmlns:a16="http://schemas.microsoft.com/office/drawing/2014/main" id="{A72804F7-C503-447E-9573-12810CD8E1E5}"/>
               </a:ext>
             </a:extLst>
           </p:cNvPr>
@@ -7571,7 +7571,7 @@
     </p:spTree>
     <p:extLst>
       <p:ext uri="{BB962C8B-B14F-4D97-AF65-F5344CB8AC3E}">
-        <p14:creationId xmlns:p14="http://schemas.microsoft.com/office/powerpoint/2010/main" val="1805494843"/>
+        <p14:creationId xmlns:p14="http://schemas.microsoft.com/office/powerpoint/2010/main" val="495212668"/>
       </p:ext>
     </p:extLst>
   </p:cSld>
@@ -7769,10 +7769,10 @@
       </p:grpSpPr>
       <p:sp>
         <p:nvSpPr>
-          <p:cNvPr id="23" name="">
-            <a:extLst xmlns:a="http://schemas.openxmlformats.org/drawingml/2006/main">
-              <a:ext uri="{FF2B5EF4-FFF2-40B4-BE49-F238E27FC236}">
-                <a16:creationId xmlns:a16="http://schemas.microsoft.com/office/drawing/2014/main" id="{062A0733-EC6B-4C7D-9EBD-03C18207EDBB}"/>
+          <p:cNvPr id="26" name="">
+            <a:extLst xmlns:a="http://schemas.openxmlformats.org/drawingml/2006/main">
+              <a:ext uri="{FF2B5EF4-FFF2-40B4-BE49-F238E27FC236}">
+                <a16:creationId xmlns:a16="http://schemas.microsoft.com/office/drawing/2014/main" id="{4F1FAADF-E38C-409E-9833-6BDEB811448A}"/>
               </a:ext>
             </a:extLst>
           </p:cNvPr>
@@ -7804,7 +7804,7 @@
           <p:cNvPr id="2" name="">
             <a:extLst xmlns:a="http://schemas.openxmlformats.org/drawingml/2006/main">
               <a:ext uri="{FF2B5EF4-FFF2-40B4-BE49-F238E27FC236}">
-                <a16:creationId xmlns:a16="http://schemas.microsoft.com/office/drawing/2014/main" id="{49C08C53-3B0C-4E38-9B53-769A85F2607C}"/>
+                <a16:creationId xmlns:a16="http://schemas.microsoft.com/office/drawing/2014/main" id="{CBDAFC2C-D18B-4B41-92F8-BDB8E1C6C536}"/>
               </a:ext>
             </a:extLst>
           </p:cNvPr>
@@ -7861,7 +7861,7 @@
           <p:cNvPr id="3" name="">
             <a:extLst xmlns:a="http://schemas.openxmlformats.org/drawingml/2006/main">
               <a:ext uri="{FF2B5EF4-FFF2-40B4-BE49-F238E27FC236}">
-                <a16:creationId xmlns:a16="http://schemas.microsoft.com/office/drawing/2014/main" id="{91CD6A47-0001-4B28-BF67-F8B6A5B77681}"/>
+                <a16:creationId xmlns:a16="http://schemas.microsoft.com/office/drawing/2014/main" id="{EF66DFFF-14ED-4156-BCB6-2E2E1923FBD3}"/>
               </a:ext>
             </a:extLst>
           </p:cNvPr>
@@ -7893,7 +7893,7 @@
           <p:cNvPr id="4" name="">
             <a:extLst xmlns:a="http://schemas.openxmlformats.org/drawingml/2006/main">
               <a:ext uri="{FF2B5EF4-FFF2-40B4-BE49-F238E27FC236}">
-                <a16:creationId xmlns:a16="http://schemas.microsoft.com/office/drawing/2014/main" id="{EEF71854-84E7-4A66-98E8-9FDAD3043FBB}"/>
+                <a16:creationId xmlns:a16="http://schemas.microsoft.com/office/drawing/2014/main" id="{0FBE0F62-E533-4D3C-AECE-64A26BC7B46E}"/>
               </a:ext>
             </a:extLst>
           </p:cNvPr>
@@ -7950,7 +7950,7 @@
           <p:cNvPr id="5" name="">
             <a:extLst xmlns:a="http://schemas.openxmlformats.org/drawingml/2006/main">
               <a:ext uri="{FF2B5EF4-FFF2-40B4-BE49-F238E27FC236}">
-                <a16:creationId xmlns:a16="http://schemas.microsoft.com/office/drawing/2014/main" id="{992AD14F-9260-4C61-B56A-F3FB43E2CB89}"/>
+                <a16:creationId xmlns:a16="http://schemas.microsoft.com/office/drawing/2014/main" id="{FBFC2267-0A27-4349-92B8-1DD5032FB335}"/>
               </a:ext>
             </a:extLst>
           </p:cNvPr>
@@ -8007,7 +8007,7 @@
           <p:cNvPr id="6" name="">
             <a:extLst xmlns:a="http://schemas.openxmlformats.org/drawingml/2006/main">
               <a:ext uri="{FF2B5EF4-FFF2-40B4-BE49-F238E27FC236}">
-                <a16:creationId xmlns:a16="http://schemas.microsoft.com/office/drawing/2014/main" id="{35E4C811-88C2-4A89-AA64-A8B138979130}"/>
+                <a16:creationId xmlns:a16="http://schemas.microsoft.com/office/drawing/2014/main" id="{664DFDBD-42F3-4AC1-8ECE-1F2A194C6282}"/>
               </a:ext>
             </a:extLst>
           </p:cNvPr>
@@ -8064,7 +8064,7 @@
           <p:cNvPr id="7" name="">
             <a:extLst xmlns:a="http://schemas.openxmlformats.org/drawingml/2006/main">
               <a:ext uri="{FF2B5EF4-FFF2-40B4-BE49-F238E27FC236}">
-                <a16:creationId xmlns:a16="http://schemas.microsoft.com/office/drawing/2014/main" id="{BFA89471-F352-46D4-9715-EC0A057B1F58}"/>
+                <a16:creationId xmlns:a16="http://schemas.microsoft.com/office/drawing/2014/main" id="{4AE0D829-CA61-49D9-AA21-A41AB7F7C880}"/>
               </a:ext>
             </a:extLst>
           </p:cNvPr>
@@ -8096,7 +8096,7 @@
           <p:cNvPr id="8" name="">
             <a:extLst xmlns:a="http://schemas.openxmlformats.org/drawingml/2006/main">
               <a:ext uri="{FF2B5EF4-FFF2-40B4-BE49-F238E27FC236}">
-                <a16:creationId xmlns:a16="http://schemas.microsoft.com/office/drawing/2014/main" id="{9E6E5746-0301-4961-AC9E-552DF88CA461}"/>
+                <a16:creationId xmlns:a16="http://schemas.microsoft.com/office/drawing/2014/main" id="{6A720A45-DF13-42BC-A3DB-0204A9BCC1CF}"/>
               </a:ext>
             </a:extLst>
           </p:cNvPr>
@@ -8153,7 +8153,7 @@
           <p:cNvPr id="9" name="">
             <a:extLst xmlns:a="http://schemas.openxmlformats.org/drawingml/2006/main">
               <a:ext uri="{FF2B5EF4-FFF2-40B4-BE49-F238E27FC236}">
-                <a16:creationId xmlns:a16="http://schemas.microsoft.com/office/drawing/2014/main" id="{78450E73-167C-4BE0-AC46-EE41C7F8EC81}"/>
+                <a16:creationId xmlns:a16="http://schemas.microsoft.com/office/drawing/2014/main" id="{564BAA42-7189-4008-9843-E48F1683A483}"/>
               </a:ext>
             </a:extLst>
           </p:cNvPr>
@@ -8210,19 +8210,19 @@
           <p:cNvPr id="10" name="">
             <a:extLst xmlns:a="http://schemas.openxmlformats.org/drawingml/2006/main">
               <a:ext uri="{FF2B5EF4-FFF2-40B4-BE49-F238E27FC236}">
-                <a16:creationId xmlns:a16="http://schemas.microsoft.com/office/drawing/2014/main" id="{DC510E4A-5E73-4023-9881-CDBC8DD60140}"/>
-              </a:ext>
-            </a:extLst>
-          </p:cNvPr>
-          <p:cNvSpPr>
-            <a:spLocks xmlns:a="http://schemas.openxmlformats.org/drawingml/2006/main" noGrp="1"/>
-          </p:cNvSpPr>
-          <p:nvPr/>
-        </p:nvSpPr>
-        <p:spPr>
-          <a:xfrm xmlns:a="http://schemas.openxmlformats.org/drawingml/2006/main">
-            <a:off x="914400" y="1257300"/>
-            <a:ext cx="10363200" cy="781050"/>
+                <a16:creationId xmlns:a16="http://schemas.microsoft.com/office/drawing/2014/main" id="{A27055E0-9AD5-4132-8CDD-402F15FBBF46}"/>
+              </a:ext>
+            </a:extLst>
+          </p:cNvPr>
+          <p:cNvSpPr>
+            <a:spLocks xmlns:a="http://schemas.openxmlformats.org/drawingml/2006/main" noGrp="1"/>
+          </p:cNvSpPr>
+          <p:nvPr/>
+        </p:nvSpPr>
+        <p:spPr>
+          <a:xfrm xmlns:a="http://schemas.openxmlformats.org/drawingml/2006/main">
+            <a:off x="857250" y="1219200"/>
+            <a:ext cx="10477500" cy="742950"/>
           </a:xfrm>
           <a:prstGeom xmlns:a="http://schemas.openxmlformats.org/drawingml/2006/main" prst="rect">
             <a:avLst/>
@@ -8239,7 +8239,7 @@
           <a:lstStyle xmlns:a="http://schemas.openxmlformats.org/drawingml/2006/main"/>
           <a:p xmlns:a="http://schemas.openxmlformats.org/drawingml/2006/main">
             <a:pPr algn="ctr">
-              <a:defRPr sz="2175" b="1">
+              <a:defRPr sz="2100" b="1">
                 <a:solidFill>
                   <a:srgbClr val="17253A"/>
                 </a:solidFill>
@@ -8249,7 +8249,7 @@
               </a:defRPr>
             </a:pPr>
             <a:r>
-              <a:rPr sz="2175" b="1">
+              <a:rPr sz="2100" b="1">
                 <a:solidFill>
                   <a:srgbClr val="17253A"/>
                 </a:solidFill>
@@ -8267,28 +8267,30 @@
           <p:cNvPr id="11" name="">
             <a:extLst xmlns:a="http://schemas.openxmlformats.org/drawingml/2006/main">
               <a:ext uri="{FF2B5EF4-FFF2-40B4-BE49-F238E27FC236}">
-                <a16:creationId xmlns:a16="http://schemas.microsoft.com/office/drawing/2014/main" id="{81B80437-461D-47FF-AD68-254A491C116F}"/>
-              </a:ext>
-            </a:extLst>
-          </p:cNvPr>
-          <p:cNvSpPr>
-            <a:spLocks xmlns:a="http://schemas.openxmlformats.org/drawingml/2006/main" noGrp="1"/>
-          </p:cNvSpPr>
-          <p:nvPr/>
-        </p:nvSpPr>
-        <p:spPr>
-          <a:xfrm xmlns:a="http://schemas.openxmlformats.org/drawingml/2006/main">
-            <a:off x="1000125" y="2247900"/>
-            <a:ext cx="476250" cy="476250"/>
-          </a:xfrm>
-          <a:prstGeom xmlns:a="http://schemas.openxmlformats.org/drawingml/2006/main" prst="ellipse">
+                <a16:creationId xmlns:a16="http://schemas.microsoft.com/office/drawing/2014/main" id="{852DA243-CB2A-48F0-8C90-887C5CF2271D}"/>
+              </a:ext>
+            </a:extLst>
+          </p:cNvPr>
+          <p:cNvSpPr>
+            <a:spLocks xmlns:a="http://schemas.openxmlformats.org/drawingml/2006/main" noGrp="1"/>
+          </p:cNvSpPr>
+          <p:nvPr/>
+        </p:nvSpPr>
+        <p:spPr>
+          <a:xfrm xmlns:a="http://schemas.openxmlformats.org/drawingml/2006/main">
+            <a:off x="971550" y="2124075"/>
+            <a:ext cx="38100" cy="3524250"/>
+          </a:xfrm>
+          <a:prstGeom xmlns:a="http://schemas.openxmlformats.org/drawingml/2006/main" prst="rect">
             <a:avLst/>
           </a:prstGeom>
           <a:solidFill xmlns:a="http://schemas.openxmlformats.org/drawingml/2006/main">
-            <a:srgbClr val="18324A"/>
+            <a:srgbClr val="2C6E73"/>
           </a:solidFill>
           <a:ln xmlns:a="http://schemas.openxmlformats.org/drawingml/2006/main" w="0">
-            <a:noFill/>
+            <a:solidFill>
+              <a:srgbClr val="2C6E73"/>
+            </a:solidFill>
           </a:ln>
         </p:spPr>
       </p:sp>
@@ -8297,19 +8299,19 @@
           <p:cNvPr id="12" name="">
             <a:extLst xmlns:a="http://schemas.openxmlformats.org/drawingml/2006/main">
               <a:ext uri="{FF2B5EF4-FFF2-40B4-BE49-F238E27FC236}">
-                <a16:creationId xmlns:a16="http://schemas.microsoft.com/office/drawing/2014/main" id="{66D6354D-FF9F-44F2-9706-01484A03A314}"/>
-              </a:ext>
-            </a:extLst>
-          </p:cNvPr>
-          <p:cNvSpPr>
-            <a:spLocks xmlns:a="http://schemas.openxmlformats.org/drawingml/2006/main" noGrp="1"/>
-          </p:cNvSpPr>
-          <p:nvPr/>
-        </p:nvSpPr>
-        <p:spPr>
-          <a:xfrm xmlns:a="http://schemas.openxmlformats.org/drawingml/2006/main">
-            <a:off x="1000125" y="2276475"/>
-            <a:ext cx="476250" cy="419100"/>
+                <a16:creationId xmlns:a16="http://schemas.microsoft.com/office/drawing/2014/main" id="{18D11170-2606-4A33-B06B-183B1B660C10}"/>
+              </a:ext>
+            </a:extLst>
+          </p:cNvPr>
+          <p:cNvSpPr>
+            <a:spLocks xmlns:a="http://schemas.openxmlformats.org/drawingml/2006/main" noGrp="1"/>
+          </p:cNvSpPr>
+          <p:nvPr/>
+        </p:nvSpPr>
+        <p:spPr>
+          <a:xfrm xmlns:a="http://schemas.openxmlformats.org/drawingml/2006/main">
+            <a:off x="1162050" y="2200275"/>
+            <a:ext cx="400050" cy="400050"/>
           </a:xfrm>
           <a:prstGeom xmlns:a="http://schemas.openxmlformats.org/drawingml/2006/main" prst="rect">
             <a:avLst/>
@@ -8326,9 +8328,9 @@
           <a:lstStyle xmlns:a="http://schemas.openxmlformats.org/drawingml/2006/main"/>
           <a:p xmlns:a="http://schemas.openxmlformats.org/drawingml/2006/main">
             <a:pPr algn="ctr">
-              <a:defRPr sz="1350" b="1">
-                <a:solidFill>
-                  <a:srgbClr val="FFFFFF"/>
+              <a:defRPr sz="1125" b="1">
+                <a:solidFill>
+                  <a:srgbClr val="2C6E73"/>
                 </a:solidFill>
                 <a:latin typeface="Arial"/>
                 <a:ea typeface="Arial"/>
@@ -8336,9 +8338,9 @@
               </a:defRPr>
             </a:pPr>
             <a:r>
-              <a:rPr sz="1350" b="1">
-                <a:solidFill>
-                  <a:srgbClr val="FFFFFF"/>
+              <a:rPr sz="1125" b="1">
+                <a:solidFill>
+                  <a:srgbClr val="2C6E73"/>
                 </a:solidFill>
                 <a:latin typeface="Arial"/>
                 <a:ea typeface="Arial"/>
@@ -8354,19 +8356,19 @@
           <p:cNvPr id="13" name="">
             <a:extLst xmlns:a="http://schemas.openxmlformats.org/drawingml/2006/main">
               <a:ext uri="{FF2B5EF4-FFF2-40B4-BE49-F238E27FC236}">
-                <a16:creationId xmlns:a16="http://schemas.microsoft.com/office/drawing/2014/main" id="{CCF5497F-84A5-4724-823D-0A0B184C5D85}"/>
-              </a:ext>
-            </a:extLst>
-          </p:cNvPr>
-          <p:cNvSpPr>
-            <a:spLocks xmlns:a="http://schemas.openxmlformats.org/drawingml/2006/main" noGrp="1"/>
-          </p:cNvSpPr>
-          <p:nvPr/>
-        </p:nvSpPr>
-        <p:spPr>
-          <a:xfrm xmlns:a="http://schemas.openxmlformats.org/drawingml/2006/main">
-            <a:off x="1714500" y="2181225"/>
-            <a:ext cx="9429750" cy="609600"/>
+                <a16:creationId xmlns:a16="http://schemas.microsoft.com/office/drawing/2014/main" id="{1325D6AF-488E-4699-9D70-8BEB33880819}"/>
+              </a:ext>
+            </a:extLst>
+          </p:cNvPr>
+          <p:cNvSpPr>
+            <a:spLocks xmlns:a="http://schemas.openxmlformats.org/drawingml/2006/main" noGrp="1"/>
+          </p:cNvSpPr>
+          <p:nvPr/>
+        </p:nvSpPr>
+        <p:spPr>
+          <a:xfrm xmlns:a="http://schemas.openxmlformats.org/drawingml/2006/main">
+            <a:off x="1714500" y="2114550"/>
+            <a:ext cx="9525000" cy="638175"/>
           </a:xfrm>
           <a:prstGeom xmlns:a="http://schemas.openxmlformats.org/drawingml/2006/main" prst="rect">
             <a:avLst/>
@@ -8383,7 +8385,7 @@
           <a:lstStyle xmlns:a="http://schemas.openxmlformats.org/drawingml/2006/main"/>
           <a:p xmlns:a="http://schemas.openxmlformats.org/drawingml/2006/main">
             <a:pPr algn="l">
-              <a:defRPr sz="1500" b="0">
+              <a:defRPr sz="1575" b="0">
                 <a:solidFill>
                   <a:srgbClr val="17253A"/>
                 </a:solidFill>
@@ -8393,7 +8395,7 @@
               </a:defRPr>
             </a:pPr>
             <a:r>
-              <a:rPr sz="1500" b="0">
+              <a:rPr sz="1575" b="0">
                 <a:solidFill>
                   <a:srgbClr val="17253A"/>
                 </a:solidFill>
@@ -8401,7 +8403,7 @@
                 <a:ea typeface="Arial"/>
                 <a:cs typeface="Arial"/>
               </a:rPr>
-              <a:t>Identify the structure: Choose a representation out of 100 or use division.</a:t>
+              <a:t>3/5, 0.58, 62%</a:t>
             </a:r>
           </a:p>
         </p:txBody>
@@ -8411,28 +8413,30 @@
           <p:cNvPr id="14" name="">
             <a:extLst xmlns:a="http://schemas.openxmlformats.org/drawingml/2006/main">
               <a:ext uri="{FF2B5EF4-FFF2-40B4-BE49-F238E27FC236}">
-                <a16:creationId xmlns:a16="http://schemas.microsoft.com/office/drawing/2014/main" id="{4CE65A4E-E1A6-4DBE-B786-23149D160D22}"/>
-              </a:ext>
-            </a:extLst>
-          </p:cNvPr>
-          <p:cNvSpPr>
-            <a:spLocks xmlns:a="http://schemas.openxmlformats.org/drawingml/2006/main" noGrp="1"/>
-          </p:cNvSpPr>
-          <p:nvPr/>
-        </p:nvSpPr>
-        <p:spPr>
-          <a:xfrm xmlns:a="http://schemas.openxmlformats.org/drawingml/2006/main">
-            <a:off x="1000125" y="2990850"/>
-            <a:ext cx="476250" cy="476250"/>
-          </a:xfrm>
-          <a:prstGeom xmlns:a="http://schemas.openxmlformats.org/drawingml/2006/main" prst="ellipse">
+                <a16:creationId xmlns:a16="http://schemas.microsoft.com/office/drawing/2014/main" id="{2B637E43-59B7-44C2-95E1-7D0F7FCBBA01}"/>
+              </a:ext>
+            </a:extLst>
+          </p:cNvPr>
+          <p:cNvSpPr>
+            <a:spLocks xmlns:a="http://schemas.openxmlformats.org/drawingml/2006/main" noGrp="1"/>
+          </p:cNvSpPr>
+          <p:nvPr/>
+        </p:nvSpPr>
+        <p:spPr>
+          <a:xfrm xmlns:a="http://schemas.openxmlformats.org/drawingml/2006/main">
+            <a:off x="1714500" y="2771775"/>
+            <a:ext cx="9334500" cy="9525"/>
+          </a:xfrm>
+          <a:prstGeom xmlns:a="http://schemas.openxmlformats.org/drawingml/2006/main" prst="rect">
             <a:avLst/>
           </a:prstGeom>
           <a:solidFill xmlns:a="http://schemas.openxmlformats.org/drawingml/2006/main">
-            <a:srgbClr val="2C6E73"/>
+            <a:srgbClr val="D9E0E6"/>
           </a:solidFill>
           <a:ln xmlns:a="http://schemas.openxmlformats.org/drawingml/2006/main" w="0">
-            <a:noFill/>
+            <a:solidFill>
+              <a:srgbClr val="D9E0E6"/>
+            </a:solidFill>
           </a:ln>
         </p:spPr>
       </p:sp>
@@ -8441,19 +8445,19 @@
           <p:cNvPr id="15" name="">
             <a:extLst xmlns:a="http://schemas.openxmlformats.org/drawingml/2006/main">
               <a:ext uri="{FF2B5EF4-FFF2-40B4-BE49-F238E27FC236}">
-                <a16:creationId xmlns:a16="http://schemas.microsoft.com/office/drawing/2014/main" id="{C1DE6FB2-E88B-4CFE-AAFB-EC66EFCA8D24}"/>
-              </a:ext>
-            </a:extLst>
-          </p:cNvPr>
-          <p:cNvSpPr>
-            <a:spLocks xmlns:a="http://schemas.openxmlformats.org/drawingml/2006/main" noGrp="1"/>
-          </p:cNvSpPr>
-          <p:nvPr/>
-        </p:nvSpPr>
-        <p:spPr>
-          <a:xfrm xmlns:a="http://schemas.openxmlformats.org/drawingml/2006/main">
-            <a:off x="1000125" y="3019425"/>
-            <a:ext cx="476250" cy="419100"/>
+                <a16:creationId xmlns:a16="http://schemas.microsoft.com/office/drawing/2014/main" id="{69BC5C71-8302-4DAA-9668-217C841D4FCD}"/>
+              </a:ext>
+            </a:extLst>
+          </p:cNvPr>
+          <p:cNvSpPr>
+            <a:spLocks xmlns:a="http://schemas.openxmlformats.org/drawingml/2006/main" noGrp="1"/>
+          </p:cNvSpPr>
+          <p:nvPr/>
+        </p:nvSpPr>
+        <p:spPr>
+          <a:xfrm xmlns:a="http://schemas.openxmlformats.org/drawingml/2006/main">
+            <a:off x="1162050" y="2905125"/>
+            <a:ext cx="400050" cy="400050"/>
           </a:xfrm>
           <a:prstGeom xmlns:a="http://schemas.openxmlformats.org/drawingml/2006/main" prst="rect">
             <a:avLst/>
@@ -8470,9 +8474,9 @@
           <a:lstStyle xmlns:a="http://schemas.openxmlformats.org/drawingml/2006/main"/>
           <a:p xmlns:a="http://schemas.openxmlformats.org/drawingml/2006/main">
             <a:pPr algn="ctr">
-              <a:defRPr sz="1350" b="1">
-                <a:solidFill>
-                  <a:srgbClr val="FFFFFF"/>
+              <a:defRPr sz="1125" b="1">
+                <a:solidFill>
+                  <a:srgbClr val="2C6E73"/>
                 </a:solidFill>
                 <a:latin typeface="Arial"/>
                 <a:ea typeface="Arial"/>
@@ -8480,9 +8484,9 @@
               </a:defRPr>
             </a:pPr>
             <a:r>
-              <a:rPr sz="1350" b="1">
-                <a:solidFill>
-                  <a:srgbClr val="FFFFFF"/>
+              <a:rPr sz="1125" b="1">
+                <a:solidFill>
+                  <a:srgbClr val="2C6E73"/>
                 </a:solidFill>
                 <a:latin typeface="Arial"/>
                 <a:ea typeface="Arial"/>
@@ -8498,19 +8502,19 @@
           <p:cNvPr id="16" name="">
             <a:extLst xmlns:a="http://schemas.openxmlformats.org/drawingml/2006/main">
               <a:ext uri="{FF2B5EF4-FFF2-40B4-BE49-F238E27FC236}">
-                <a16:creationId xmlns:a16="http://schemas.microsoft.com/office/drawing/2014/main" id="{DD0927F5-A315-4BA7-886D-97C8350063BE}"/>
-              </a:ext>
-            </a:extLst>
-          </p:cNvPr>
-          <p:cNvSpPr>
-            <a:spLocks xmlns:a="http://schemas.openxmlformats.org/drawingml/2006/main" noGrp="1"/>
-          </p:cNvSpPr>
-          <p:nvPr/>
-        </p:nvSpPr>
-        <p:spPr>
-          <a:xfrm xmlns:a="http://schemas.openxmlformats.org/drawingml/2006/main">
-            <a:off x="1714500" y="2924175"/>
-            <a:ext cx="9429750" cy="609600"/>
+                <a16:creationId xmlns:a16="http://schemas.microsoft.com/office/drawing/2014/main" id="{D4F397F7-66FC-4B63-BC57-90FECCFAD5EA}"/>
+              </a:ext>
+            </a:extLst>
+          </p:cNvPr>
+          <p:cNvSpPr>
+            <a:spLocks xmlns:a="http://schemas.openxmlformats.org/drawingml/2006/main" noGrp="1"/>
+          </p:cNvSpPr>
+          <p:nvPr/>
+        </p:nvSpPr>
+        <p:spPr>
+          <a:xfrm xmlns:a="http://schemas.openxmlformats.org/drawingml/2006/main">
+            <a:off x="1714500" y="2819400"/>
+            <a:ext cx="9525000" cy="638175"/>
           </a:xfrm>
           <a:prstGeom xmlns:a="http://schemas.openxmlformats.org/drawingml/2006/main" prst="rect">
             <a:avLst/>
@@ -8527,7 +8531,7 @@
           <a:lstStyle xmlns:a="http://schemas.openxmlformats.org/drawingml/2006/main"/>
           <a:p xmlns:a="http://schemas.openxmlformats.org/drawingml/2006/main">
             <a:pPr algn="l">
-              <a:defRPr sz="1500" b="0">
+              <a:defRPr sz="1575" b="0">
                 <a:solidFill>
                   <a:srgbClr val="17253A"/>
                 </a:solidFill>
@@ -8537,7 +8541,7 @@
               </a:defRPr>
             </a:pPr>
             <a:r>
-              <a:rPr sz="1500" b="0">
+              <a:rPr sz="1575" b="0">
                 <a:solidFill>
                   <a:srgbClr val="17253A"/>
                 </a:solidFill>
@@ -8545,7 +8549,7 @@
                 <a:ea typeface="Arial"/>
                 <a:cs typeface="Arial"/>
               </a:rPr>
-              <a:t>Set up the method: Convert carefully while preserving the value.</a:t>
+              <a:t>3/5 = 0.60</a:t>
             </a:r>
           </a:p>
         </p:txBody>
@@ -8555,28 +8559,30 @@
           <p:cNvPr id="17" name="">
             <a:extLst xmlns:a="http://schemas.openxmlformats.org/drawingml/2006/main">
               <a:ext uri="{FF2B5EF4-FFF2-40B4-BE49-F238E27FC236}">
-                <a16:creationId xmlns:a16="http://schemas.microsoft.com/office/drawing/2014/main" id="{BCEDAE4C-888E-4D7C-AA3D-81A83069ECF2}"/>
-              </a:ext>
-            </a:extLst>
-          </p:cNvPr>
-          <p:cNvSpPr>
-            <a:spLocks xmlns:a="http://schemas.openxmlformats.org/drawingml/2006/main" noGrp="1"/>
-          </p:cNvSpPr>
-          <p:nvPr/>
-        </p:nvSpPr>
-        <p:spPr>
-          <a:xfrm xmlns:a="http://schemas.openxmlformats.org/drawingml/2006/main">
-            <a:off x="1000125" y="3733800"/>
-            <a:ext cx="476250" cy="476250"/>
-          </a:xfrm>
-          <a:prstGeom xmlns:a="http://schemas.openxmlformats.org/drawingml/2006/main" prst="ellipse">
+                <a16:creationId xmlns:a16="http://schemas.microsoft.com/office/drawing/2014/main" id="{B862334B-8ACC-4893-BFAD-973E0FBE453C}"/>
+              </a:ext>
+            </a:extLst>
+          </p:cNvPr>
+          <p:cNvSpPr>
+            <a:spLocks xmlns:a="http://schemas.openxmlformats.org/drawingml/2006/main" noGrp="1"/>
+          </p:cNvSpPr>
+          <p:nvPr/>
+        </p:nvSpPr>
+        <p:spPr>
+          <a:xfrm xmlns:a="http://schemas.openxmlformats.org/drawingml/2006/main">
+            <a:off x="1714500" y="3476625"/>
+            <a:ext cx="9334500" cy="9525"/>
+          </a:xfrm>
+          <a:prstGeom xmlns:a="http://schemas.openxmlformats.org/drawingml/2006/main" prst="rect">
             <a:avLst/>
           </a:prstGeom>
           <a:solidFill xmlns:a="http://schemas.openxmlformats.org/drawingml/2006/main">
-            <a:srgbClr val="2C6E73"/>
+            <a:srgbClr val="D9E0E6"/>
           </a:solidFill>
           <a:ln xmlns:a="http://schemas.openxmlformats.org/drawingml/2006/main" w="0">
-            <a:noFill/>
+            <a:solidFill>
+              <a:srgbClr val="D9E0E6"/>
+            </a:solidFill>
           </a:ln>
         </p:spPr>
       </p:sp>
@@ -8585,19 +8591,19 @@
           <p:cNvPr id="18" name="">
             <a:extLst xmlns:a="http://schemas.openxmlformats.org/drawingml/2006/main">
               <a:ext uri="{FF2B5EF4-FFF2-40B4-BE49-F238E27FC236}">
-                <a16:creationId xmlns:a16="http://schemas.microsoft.com/office/drawing/2014/main" id="{B7DCEFC7-963D-4B22-8170-160FE4F79F69}"/>
-              </a:ext>
-            </a:extLst>
-          </p:cNvPr>
-          <p:cNvSpPr>
-            <a:spLocks xmlns:a="http://schemas.openxmlformats.org/drawingml/2006/main" noGrp="1"/>
-          </p:cNvSpPr>
-          <p:nvPr/>
-        </p:nvSpPr>
-        <p:spPr>
-          <a:xfrm xmlns:a="http://schemas.openxmlformats.org/drawingml/2006/main">
-            <a:off x="1000125" y="3762375"/>
-            <a:ext cx="476250" cy="419100"/>
+                <a16:creationId xmlns:a16="http://schemas.microsoft.com/office/drawing/2014/main" id="{217BF997-5256-48DF-9B04-A49D5ADBF774}"/>
+              </a:ext>
+            </a:extLst>
+          </p:cNvPr>
+          <p:cNvSpPr>
+            <a:spLocks xmlns:a="http://schemas.openxmlformats.org/drawingml/2006/main" noGrp="1"/>
+          </p:cNvSpPr>
+          <p:nvPr/>
+        </p:nvSpPr>
+        <p:spPr>
+          <a:xfrm xmlns:a="http://schemas.openxmlformats.org/drawingml/2006/main">
+            <a:off x="1162050" y="3609975"/>
+            <a:ext cx="400050" cy="400050"/>
           </a:xfrm>
           <a:prstGeom xmlns:a="http://schemas.openxmlformats.org/drawingml/2006/main" prst="rect">
             <a:avLst/>
@@ -8614,9 +8620,9 @@
           <a:lstStyle xmlns:a="http://schemas.openxmlformats.org/drawingml/2006/main"/>
           <a:p xmlns:a="http://schemas.openxmlformats.org/drawingml/2006/main">
             <a:pPr algn="ctr">
-              <a:defRPr sz="1350" b="1">
-                <a:solidFill>
-                  <a:srgbClr val="FFFFFF"/>
+              <a:defRPr sz="1125" b="1">
+                <a:solidFill>
+                  <a:srgbClr val="2C6E73"/>
                 </a:solidFill>
                 <a:latin typeface="Arial"/>
                 <a:ea typeface="Arial"/>
@@ -8624,9 +8630,9 @@
               </a:defRPr>
             </a:pPr>
             <a:r>
-              <a:rPr sz="1350" b="1">
-                <a:solidFill>
-                  <a:srgbClr val="FFFFFF"/>
+              <a:rPr sz="1125" b="1">
+                <a:solidFill>
+                  <a:srgbClr val="2C6E73"/>
                 </a:solidFill>
                 <a:latin typeface="Arial"/>
                 <a:ea typeface="Arial"/>
@@ -8642,19 +8648,19 @@
           <p:cNvPr id="19" name="">
             <a:extLst xmlns:a="http://schemas.openxmlformats.org/drawingml/2006/main">
               <a:ext uri="{FF2B5EF4-FFF2-40B4-BE49-F238E27FC236}">
-                <a16:creationId xmlns:a16="http://schemas.microsoft.com/office/drawing/2014/main" id="{D80192E3-5835-47DC-8E7C-4E31D24A3797}"/>
-              </a:ext>
-            </a:extLst>
-          </p:cNvPr>
-          <p:cNvSpPr>
-            <a:spLocks xmlns:a="http://schemas.openxmlformats.org/drawingml/2006/main" noGrp="1"/>
-          </p:cNvSpPr>
-          <p:nvPr/>
-        </p:nvSpPr>
-        <p:spPr>
-          <a:xfrm xmlns:a="http://schemas.openxmlformats.org/drawingml/2006/main">
-            <a:off x="1714500" y="3667125"/>
-            <a:ext cx="9429750" cy="609600"/>
+                <a16:creationId xmlns:a16="http://schemas.microsoft.com/office/drawing/2014/main" id="{42FA777D-08DD-4A58-8E81-D01C0B8DB191}"/>
+              </a:ext>
+            </a:extLst>
+          </p:cNvPr>
+          <p:cNvSpPr>
+            <a:spLocks xmlns:a="http://schemas.openxmlformats.org/drawingml/2006/main" noGrp="1"/>
+          </p:cNvSpPr>
+          <p:nvPr/>
+        </p:nvSpPr>
+        <p:spPr>
+          <a:xfrm xmlns:a="http://schemas.openxmlformats.org/drawingml/2006/main">
+            <a:off x="1714500" y="3524250"/>
+            <a:ext cx="9525000" cy="638175"/>
           </a:xfrm>
           <a:prstGeom xmlns:a="http://schemas.openxmlformats.org/drawingml/2006/main" prst="rect">
             <a:avLst/>
@@ -8671,7 +8677,7 @@
           <a:lstStyle xmlns:a="http://schemas.openxmlformats.org/drawingml/2006/main"/>
           <a:p xmlns:a="http://schemas.openxmlformats.org/drawingml/2006/main">
             <a:pPr algn="l">
-              <a:defRPr sz="1500" b="0">
+              <a:defRPr sz="1575" b="0">
                 <a:solidFill>
                   <a:srgbClr val="17253A"/>
                 </a:solidFill>
@@ -8681,7 +8687,7 @@
               </a:defRPr>
             </a:pPr>
             <a:r>
-              <a:rPr sz="1500" b="0">
+              <a:rPr sz="1575" b="0">
                 <a:solidFill>
                   <a:srgbClr val="17253A"/>
                 </a:solidFill>
@@ -8689,7 +8695,7 @@
                 <a:ea typeface="Arial"/>
                 <a:cs typeface="Arial"/>
               </a:rPr>
-              <a:t>Complete the calculation: 0.58, 3/5, 62%.</a:t>
+              <a:t>62% = 0.62</a:t>
             </a:r>
           </a:p>
         </p:txBody>
@@ -8699,28 +8705,30 @@
           <p:cNvPr id="20" name="">
             <a:extLst xmlns:a="http://schemas.openxmlformats.org/drawingml/2006/main">
               <a:ext uri="{FF2B5EF4-FFF2-40B4-BE49-F238E27FC236}">
-                <a16:creationId xmlns:a16="http://schemas.microsoft.com/office/drawing/2014/main" id="{6EC6E182-E4FA-4DAD-920D-7E3AC4D421BC}"/>
-              </a:ext>
-            </a:extLst>
-          </p:cNvPr>
-          <p:cNvSpPr>
-            <a:spLocks xmlns:a="http://schemas.openxmlformats.org/drawingml/2006/main" noGrp="1"/>
-          </p:cNvSpPr>
-          <p:nvPr/>
-        </p:nvSpPr>
-        <p:spPr>
-          <a:xfrm xmlns:a="http://schemas.openxmlformats.org/drawingml/2006/main">
-            <a:off x="1000125" y="4476750"/>
-            <a:ext cx="476250" cy="476250"/>
-          </a:xfrm>
-          <a:prstGeom xmlns:a="http://schemas.openxmlformats.org/drawingml/2006/main" prst="ellipse">
+                <a16:creationId xmlns:a16="http://schemas.microsoft.com/office/drawing/2014/main" id="{C64514CE-4F6A-4BC0-8216-E9DD5E269C8E}"/>
+              </a:ext>
+            </a:extLst>
+          </p:cNvPr>
+          <p:cNvSpPr>
+            <a:spLocks xmlns:a="http://schemas.openxmlformats.org/drawingml/2006/main" noGrp="1"/>
+          </p:cNvSpPr>
+          <p:nvPr/>
+        </p:nvSpPr>
+        <p:spPr>
+          <a:xfrm xmlns:a="http://schemas.openxmlformats.org/drawingml/2006/main">
+            <a:off x="1714500" y="4181475"/>
+            <a:ext cx="9334500" cy="9525"/>
+          </a:xfrm>
+          <a:prstGeom xmlns:a="http://schemas.openxmlformats.org/drawingml/2006/main" prst="rect">
             <a:avLst/>
           </a:prstGeom>
           <a:solidFill xmlns:a="http://schemas.openxmlformats.org/drawingml/2006/main">
-            <a:srgbClr val="2C6E73"/>
+            <a:srgbClr val="D9E0E6"/>
           </a:solidFill>
           <a:ln xmlns:a="http://schemas.openxmlformats.org/drawingml/2006/main" w="0">
-            <a:noFill/>
+            <a:solidFill>
+              <a:srgbClr val="D9E0E6"/>
+            </a:solidFill>
           </a:ln>
         </p:spPr>
       </p:sp>
@@ -8729,19 +8737,19 @@
           <p:cNvPr id="21" name="">
             <a:extLst xmlns:a="http://schemas.openxmlformats.org/drawingml/2006/main">
               <a:ext uri="{FF2B5EF4-FFF2-40B4-BE49-F238E27FC236}">
-                <a16:creationId xmlns:a16="http://schemas.microsoft.com/office/drawing/2014/main" id="{D8B8A9DB-3E6B-4C49-81F9-0E4BAB34B0B5}"/>
-              </a:ext>
-            </a:extLst>
-          </p:cNvPr>
-          <p:cNvSpPr>
-            <a:spLocks xmlns:a="http://schemas.openxmlformats.org/drawingml/2006/main" noGrp="1"/>
-          </p:cNvSpPr>
-          <p:nvPr/>
-        </p:nvSpPr>
-        <p:spPr>
-          <a:xfrm xmlns:a="http://schemas.openxmlformats.org/drawingml/2006/main">
-            <a:off x="1000125" y="4505325"/>
-            <a:ext cx="476250" cy="419100"/>
+                <a16:creationId xmlns:a16="http://schemas.microsoft.com/office/drawing/2014/main" id="{D03C679E-D6E8-46F7-838A-E3F387D7D8E4}"/>
+              </a:ext>
+            </a:extLst>
+          </p:cNvPr>
+          <p:cNvSpPr>
+            <a:spLocks xmlns:a="http://schemas.openxmlformats.org/drawingml/2006/main" noGrp="1"/>
+          </p:cNvSpPr>
+          <p:nvPr/>
+        </p:nvSpPr>
+        <p:spPr>
+          <a:xfrm xmlns:a="http://schemas.openxmlformats.org/drawingml/2006/main">
+            <a:off x="1162050" y="4314825"/>
+            <a:ext cx="400050" cy="400050"/>
           </a:xfrm>
           <a:prstGeom xmlns:a="http://schemas.openxmlformats.org/drawingml/2006/main" prst="rect">
             <a:avLst/>
@@ -8758,9 +8766,9 @@
           <a:lstStyle xmlns:a="http://schemas.openxmlformats.org/drawingml/2006/main"/>
           <a:p xmlns:a="http://schemas.openxmlformats.org/drawingml/2006/main">
             <a:pPr algn="ctr">
-              <a:defRPr sz="1350" b="1">
-                <a:solidFill>
-                  <a:srgbClr val="FFFFFF"/>
+              <a:defRPr sz="1125" b="1">
+                <a:solidFill>
+                  <a:srgbClr val="2C6E73"/>
                 </a:solidFill>
                 <a:latin typeface="Arial"/>
                 <a:ea typeface="Arial"/>
@@ -8768,9 +8776,9 @@
               </a:defRPr>
             </a:pPr>
             <a:r>
-              <a:rPr sz="1350" b="1">
-                <a:solidFill>
-                  <a:srgbClr val="FFFFFF"/>
+              <a:rPr sz="1125" b="1">
+                <a:solidFill>
+                  <a:srgbClr val="2C6E73"/>
                 </a:solidFill>
                 <a:latin typeface="Arial"/>
                 <a:ea typeface="Arial"/>
@@ -8786,19 +8794,19 @@
           <p:cNvPr id="22" name="">
             <a:extLst xmlns:a="http://schemas.openxmlformats.org/drawingml/2006/main">
               <a:ext uri="{FF2B5EF4-FFF2-40B4-BE49-F238E27FC236}">
-                <a16:creationId xmlns:a16="http://schemas.microsoft.com/office/drawing/2014/main" id="{DBFB2852-6BC2-4E1A-8032-4E25D07BBC7F}"/>
-              </a:ext>
-            </a:extLst>
-          </p:cNvPr>
-          <p:cNvSpPr>
-            <a:spLocks xmlns:a="http://schemas.openxmlformats.org/drawingml/2006/main" noGrp="1"/>
-          </p:cNvSpPr>
-          <p:nvPr/>
-        </p:nvSpPr>
-        <p:spPr>
-          <a:xfrm xmlns:a="http://schemas.openxmlformats.org/drawingml/2006/main">
-            <a:off x="1714500" y="4410075"/>
-            <a:ext cx="9429750" cy="609600"/>
+                <a16:creationId xmlns:a16="http://schemas.microsoft.com/office/drawing/2014/main" id="{85E08397-4289-4155-B26B-2EBAB3DC95B8}"/>
+              </a:ext>
+            </a:extLst>
+          </p:cNvPr>
+          <p:cNvSpPr>
+            <a:spLocks xmlns:a="http://schemas.openxmlformats.org/drawingml/2006/main" noGrp="1"/>
+          </p:cNvSpPr>
+          <p:nvPr/>
+        </p:nvSpPr>
+        <p:spPr>
+          <a:xfrm xmlns:a="http://schemas.openxmlformats.org/drawingml/2006/main">
+            <a:off x="1714500" y="4229100"/>
+            <a:ext cx="9525000" cy="638175"/>
           </a:xfrm>
           <a:prstGeom xmlns:a="http://schemas.openxmlformats.org/drawingml/2006/main" prst="rect">
             <a:avLst/>
@@ -8815,9 +8823,9 @@
           <a:lstStyle xmlns:a="http://schemas.openxmlformats.org/drawingml/2006/main"/>
           <a:p xmlns:a="http://schemas.openxmlformats.org/drawingml/2006/main">
             <a:pPr algn="l">
-              <a:defRPr sz="1500" b="1">
-                <a:solidFill>
-                  <a:srgbClr val="2F785D"/>
+              <a:defRPr sz="1575" b="0">
+                <a:solidFill>
+                  <a:srgbClr val="17253A"/>
                 </a:solidFill>
                 <a:latin typeface="Arial"/>
                 <a:ea typeface="Arial"/>
@@ -8825,15 +8833,161 @@
               </a:defRPr>
             </a:pPr>
             <a:r>
-              <a:rPr sz="1500" b="1">
+              <a:rPr sz="1575" b="0">
+                <a:solidFill>
+                  <a:srgbClr val="17253A"/>
+                </a:solidFill>
+                <a:latin typeface="Arial"/>
+                <a:ea typeface="Arial"/>
+                <a:cs typeface="Arial"/>
+              </a:rPr>
+              <a:t>0.58 &lt; 0.60 &lt; 0.62</a:t>
+            </a:r>
+          </a:p>
+        </p:txBody>
+      </p:sp>
+      <p:sp>
+        <p:nvSpPr>
+          <p:cNvPr id="23" name="">
+            <a:extLst xmlns:a="http://schemas.openxmlformats.org/drawingml/2006/main">
+              <a:ext uri="{FF2B5EF4-FFF2-40B4-BE49-F238E27FC236}">
+                <a16:creationId xmlns:a16="http://schemas.microsoft.com/office/drawing/2014/main" id="{F8BDB925-2C4F-4674-9CC9-05D7ABF24740}"/>
+              </a:ext>
+            </a:extLst>
+          </p:cNvPr>
+          <p:cNvSpPr>
+            <a:spLocks xmlns:a="http://schemas.openxmlformats.org/drawingml/2006/main" noGrp="1"/>
+          </p:cNvSpPr>
+          <p:nvPr/>
+        </p:nvSpPr>
+        <p:spPr>
+          <a:xfrm xmlns:a="http://schemas.openxmlformats.org/drawingml/2006/main">
+            <a:off x="1714500" y="4886325"/>
+            <a:ext cx="9334500" cy="9525"/>
+          </a:xfrm>
+          <a:prstGeom xmlns:a="http://schemas.openxmlformats.org/drawingml/2006/main" prst="rect">
+            <a:avLst/>
+          </a:prstGeom>
+          <a:solidFill xmlns:a="http://schemas.openxmlformats.org/drawingml/2006/main">
+            <a:srgbClr val="D9E0E6"/>
+          </a:solidFill>
+          <a:ln xmlns:a="http://schemas.openxmlformats.org/drawingml/2006/main" w="0">
+            <a:solidFill>
+              <a:srgbClr val="D9E0E6"/>
+            </a:solidFill>
+          </a:ln>
+        </p:spPr>
+      </p:sp>
+      <p:sp>
+        <p:nvSpPr>
+          <p:cNvPr id="24" name="">
+            <a:extLst xmlns:a="http://schemas.openxmlformats.org/drawingml/2006/main">
+              <a:ext uri="{FF2B5EF4-FFF2-40B4-BE49-F238E27FC236}">
+                <a16:creationId xmlns:a16="http://schemas.microsoft.com/office/drawing/2014/main" id="{F352DC7A-677D-4060-B9BD-C64D68098CD6}"/>
+              </a:ext>
+            </a:extLst>
+          </p:cNvPr>
+          <p:cNvSpPr>
+            <a:spLocks xmlns:a="http://schemas.openxmlformats.org/drawingml/2006/main" noGrp="1"/>
+          </p:cNvSpPr>
+          <p:nvPr/>
+        </p:nvSpPr>
+        <p:spPr>
+          <a:xfrm xmlns:a="http://schemas.openxmlformats.org/drawingml/2006/main">
+            <a:off x="1162050" y="5019675"/>
+            <a:ext cx="400050" cy="400050"/>
+          </a:xfrm>
+          <a:prstGeom xmlns:a="http://schemas.openxmlformats.org/drawingml/2006/main" prst="rect">
+            <a:avLst/>
+          </a:prstGeom>
+          <a:noFill xmlns:a="http://schemas.openxmlformats.org/drawingml/2006/main"/>
+          <a:ln xmlns:a="http://schemas.openxmlformats.org/drawingml/2006/main" w="0">
+            <a:noFill/>
+          </a:ln>
+        </p:spPr>
+        <p:txBody>
+          <a:bodyPr xmlns:a="http://schemas.openxmlformats.org/drawingml/2006/main" anchor="ctr">
+            <a:normAutofit fontScale="100000"/>
+          </a:bodyPr>
+          <a:lstStyle xmlns:a="http://schemas.openxmlformats.org/drawingml/2006/main"/>
+          <a:p xmlns:a="http://schemas.openxmlformats.org/drawingml/2006/main">
+            <a:pPr algn="ctr">
+              <a:defRPr sz="1125" b="1">
                 <a:solidFill>
                   <a:srgbClr val="2F785D"/>
                 </a:solidFill>
                 <a:latin typeface="Arial"/>
                 <a:ea typeface="Arial"/>
                 <a:cs typeface="Arial"/>
+              </a:defRPr>
+            </a:pPr>
+            <a:r>
+              <a:rPr sz="1125" b="1">
+                <a:solidFill>
+                  <a:srgbClr val="2F785D"/>
+                </a:solidFill>
+                <a:latin typeface="Arial"/>
+                <a:ea typeface="Arial"/>
+                <a:cs typeface="Arial"/>
               </a:rPr>
-              <a:t>Check the result: Check the three forms against a benchmark such as one half.</a:t>
+              <a:t>5</a:t>
+            </a:r>
+          </a:p>
+        </p:txBody>
+      </p:sp>
+      <p:sp>
+        <p:nvSpPr>
+          <p:cNvPr id="25" name="">
+            <a:extLst xmlns:a="http://schemas.openxmlformats.org/drawingml/2006/main">
+              <a:ext uri="{FF2B5EF4-FFF2-40B4-BE49-F238E27FC236}">
+                <a16:creationId xmlns:a16="http://schemas.microsoft.com/office/drawing/2014/main" id="{351EBDB7-D590-4498-BB55-16224BAE1682}"/>
+              </a:ext>
+            </a:extLst>
+          </p:cNvPr>
+          <p:cNvSpPr>
+            <a:spLocks xmlns:a="http://schemas.openxmlformats.org/drawingml/2006/main" noGrp="1"/>
+          </p:cNvSpPr>
+          <p:nvPr/>
+        </p:nvSpPr>
+        <p:spPr>
+          <a:xfrm xmlns:a="http://schemas.openxmlformats.org/drawingml/2006/main">
+            <a:off x="1714500" y="4933950"/>
+            <a:ext cx="9525000" cy="638175"/>
+          </a:xfrm>
+          <a:prstGeom xmlns:a="http://schemas.openxmlformats.org/drawingml/2006/main" prst="rect">
+            <a:avLst/>
+          </a:prstGeom>
+          <a:noFill xmlns:a="http://schemas.openxmlformats.org/drawingml/2006/main"/>
+          <a:ln xmlns:a="http://schemas.openxmlformats.org/drawingml/2006/main" w="0">
+            <a:noFill/>
+          </a:ln>
+        </p:spPr>
+        <p:txBody>
+          <a:bodyPr xmlns:a="http://schemas.openxmlformats.org/drawingml/2006/main" anchor="ctr">
+            <a:normAutofit fontScale="100000"/>
+          </a:bodyPr>
+          <a:lstStyle xmlns:a="http://schemas.openxmlformats.org/drawingml/2006/main"/>
+          <a:p xmlns:a="http://schemas.openxmlformats.org/drawingml/2006/main">
+            <a:pPr algn="l">
+              <a:defRPr sz="1575" b="1">
+                <a:solidFill>
+                  <a:srgbClr val="2F785D"/>
+                </a:solidFill>
+                <a:latin typeface="Arial"/>
+                <a:ea typeface="Arial"/>
+                <a:cs typeface="Arial"/>
+              </a:defRPr>
+            </a:pPr>
+            <a:r>
+              <a:rPr sz="1575" b="1">
+                <a:solidFill>
+                  <a:srgbClr val="2F785D"/>
+                </a:solidFill>
+                <a:latin typeface="Arial"/>
+                <a:ea typeface="Arial"/>
+                <a:cs typeface="Arial"/>
+              </a:rPr>
+              <a:t>0.58, 3/5, 62%</a:t>
             </a:r>
           </a:p>
         </p:txBody>
@@ -8841,7 +8995,7 @@
     </p:spTree>
     <p:extLst>
       <p:ext uri="{BB962C8B-B14F-4D97-AF65-F5344CB8AC3E}">
-        <p14:creationId xmlns:p14="http://schemas.microsoft.com/office/powerpoint/2010/main" val="1353349661"/>
+        <p14:creationId xmlns:p14="http://schemas.microsoft.com/office/powerpoint/2010/main" val="2088583992"/>
       </p:ext>
     </p:extLst>
   </p:cSld>
@@ -9078,6 +9232,51 @@
                       </p:childTnLst>
                     </p:cTn>
                   </p:par>
+                  <p:par>
+                    <p:cTn id="23" fill="hold">
+                      <p:stCondLst>
+                        <p:cond delay="indefinite"/>
+                      </p:stCondLst>
+                      <p:childTnLst>
+                        <p:par>
+                          <p:cTn id="24" fill="hold">
+                            <p:stCondLst>
+                              <p:cond delay="0"/>
+                            </p:stCondLst>
+                            <p:childTnLst>
+                              <p:par>
+                                <p:cTn id="25" presetID="1" presetClass="entr" presetSubtype="0" fill="hold" grpId="0" nodeType="clickEffect">
+                                  <p:stCondLst>
+                                    <p:cond delay="0"/>
+                                  </p:stCondLst>
+                                  <p:childTnLst>
+                                    <p:set>
+                                      <p:cBhvr>
+                                        <p:cTn id="26" dur="1" fill="hold">
+                                          <p:stCondLst>
+                                            <p:cond delay="0"/>
+                                          </p:stCondLst>
+                                        </p:cTn>
+                                        <p:tgtEl>
+                                          <p:spTgt spid="25"/>
+                                        </p:tgtEl>
+                                        <p:attrNameLst>
+                                          <p:attrName>style.visibility</p:attrName>
+                                        </p:attrNameLst>
+                                      </p:cBhvr>
+                                      <p:to>
+                                        <p:strVal val="visible"/>
+                                      </p:to>
+                                    </p:set>
+                                  </p:childTnLst>
+                                </p:cTn>
+                              </p:par>
+                            </p:childTnLst>
+                          </p:cTn>
+                        </p:par>
+                      </p:childTnLst>
+                    </p:cTn>
+                  </p:par>
                 </p:childTnLst>
               </p:cTn>
               <p:prevCondLst>
@@ -9105,6 +9304,7 @@
       <p:bldP spid="16" grpId="0"/>
       <p:bldP spid="19" grpId="0"/>
       <p:bldP spid="22" grpId="0"/>
+      <p:bldP spid="25" grpId="0"/>
     </p:bldLst>
   </p:timing>
 </p:sld>
@@ -9134,7 +9334,7 @@
           <p:cNvPr id="15" name="">
             <a:extLst xmlns:a="http://schemas.openxmlformats.org/drawingml/2006/main">
               <a:ext uri="{FF2B5EF4-FFF2-40B4-BE49-F238E27FC236}">
-                <a16:creationId xmlns:a16="http://schemas.microsoft.com/office/drawing/2014/main" id="{84067AD2-2B78-4328-9E0F-EDB1141A44F7}"/>
+                <a16:creationId xmlns:a16="http://schemas.microsoft.com/office/drawing/2014/main" id="{2FE474EE-7724-4978-83FF-3D669429C194}"/>
               </a:ext>
             </a:extLst>
           </p:cNvPr>
@@ -9166,7 +9366,7 @@
           <p:cNvPr id="2" name="">
             <a:extLst xmlns:a="http://schemas.openxmlformats.org/drawingml/2006/main">
               <a:ext uri="{FF2B5EF4-FFF2-40B4-BE49-F238E27FC236}">
-                <a16:creationId xmlns:a16="http://schemas.microsoft.com/office/drawing/2014/main" id="{8C4B6570-456B-46BF-A7FB-DE903FA4A74C}"/>
+                <a16:creationId xmlns:a16="http://schemas.microsoft.com/office/drawing/2014/main" id="{75933909-2646-43B0-A730-C4918566E7DF}"/>
               </a:ext>
             </a:extLst>
           </p:cNvPr>
@@ -9223,7 +9423,7 @@
           <p:cNvPr id="3" name="">
             <a:extLst xmlns:a="http://schemas.openxmlformats.org/drawingml/2006/main">
               <a:ext uri="{FF2B5EF4-FFF2-40B4-BE49-F238E27FC236}">
-                <a16:creationId xmlns:a16="http://schemas.microsoft.com/office/drawing/2014/main" id="{C364A18D-05F4-436C-8129-E925CB1E5AC7}"/>
+                <a16:creationId xmlns:a16="http://schemas.microsoft.com/office/drawing/2014/main" id="{C7DEBCD7-D3D9-43B3-9930-053E3C4E8880}"/>
               </a:ext>
             </a:extLst>
           </p:cNvPr>
@@ -9255,7 +9455,7 @@
           <p:cNvPr id="4" name="">
             <a:extLst xmlns:a="http://schemas.openxmlformats.org/drawingml/2006/main">
               <a:ext uri="{FF2B5EF4-FFF2-40B4-BE49-F238E27FC236}">
-                <a16:creationId xmlns:a16="http://schemas.microsoft.com/office/drawing/2014/main" id="{5BB47093-4A0B-4216-8E33-FF9EC7489C99}"/>
+                <a16:creationId xmlns:a16="http://schemas.microsoft.com/office/drawing/2014/main" id="{4E7DA3E7-6300-475F-946A-DAD4421FDEC6}"/>
               </a:ext>
             </a:extLst>
           </p:cNvPr>
@@ -9312,7 +9512,7 @@
           <p:cNvPr id="5" name="">
             <a:extLst xmlns:a="http://schemas.openxmlformats.org/drawingml/2006/main">
               <a:ext uri="{FF2B5EF4-FFF2-40B4-BE49-F238E27FC236}">
-                <a16:creationId xmlns:a16="http://schemas.microsoft.com/office/drawing/2014/main" id="{97E99F78-1653-4245-8072-7BDC003C224B}"/>
+                <a16:creationId xmlns:a16="http://schemas.microsoft.com/office/drawing/2014/main" id="{07E8D663-9BCF-4055-A9D3-6C6A11771F1A}"/>
               </a:ext>
             </a:extLst>
           </p:cNvPr>
@@ -9369,7 +9569,7 @@
           <p:cNvPr id="6" name="">
             <a:extLst xmlns:a="http://schemas.openxmlformats.org/drawingml/2006/main">
               <a:ext uri="{FF2B5EF4-FFF2-40B4-BE49-F238E27FC236}">
-                <a16:creationId xmlns:a16="http://schemas.microsoft.com/office/drawing/2014/main" id="{AAF12C98-8E74-4B35-A807-F2024438B4BA}"/>
+                <a16:creationId xmlns:a16="http://schemas.microsoft.com/office/drawing/2014/main" id="{6CB0A1CB-3E6D-4273-85DA-FB08E1A160CE}"/>
               </a:ext>
             </a:extLst>
           </p:cNvPr>
@@ -9426,7 +9626,7 @@
           <p:cNvPr id="7" name="">
             <a:extLst xmlns:a="http://schemas.openxmlformats.org/drawingml/2006/main">
               <a:ext uri="{FF2B5EF4-FFF2-40B4-BE49-F238E27FC236}">
-                <a16:creationId xmlns:a16="http://schemas.microsoft.com/office/drawing/2014/main" id="{CE77EE58-933A-4D75-82ED-FDC82775A66D}"/>
+                <a16:creationId xmlns:a16="http://schemas.microsoft.com/office/drawing/2014/main" id="{2AEBA725-B2D9-4940-88EF-F9CA8F852122}"/>
               </a:ext>
             </a:extLst>
           </p:cNvPr>
@@ -9458,7 +9658,7 @@
           <p:cNvPr id="8" name="">
             <a:extLst xmlns:a="http://schemas.openxmlformats.org/drawingml/2006/main">
               <a:ext uri="{FF2B5EF4-FFF2-40B4-BE49-F238E27FC236}">
-                <a16:creationId xmlns:a16="http://schemas.microsoft.com/office/drawing/2014/main" id="{FB892B9B-272B-4EFD-BD82-C33EABC96056}"/>
+                <a16:creationId xmlns:a16="http://schemas.microsoft.com/office/drawing/2014/main" id="{80AE21BE-1AC4-4AC3-BDB0-E20E5C6B6B43}"/>
               </a:ext>
             </a:extLst>
           </p:cNvPr>
@@ -9515,7 +9715,7 @@
           <p:cNvPr id="9" name="">
             <a:extLst xmlns:a="http://schemas.openxmlformats.org/drawingml/2006/main">
               <a:ext uri="{FF2B5EF4-FFF2-40B4-BE49-F238E27FC236}">
-                <a16:creationId xmlns:a16="http://schemas.microsoft.com/office/drawing/2014/main" id="{E44D9F3F-17D1-4C59-8EB4-1FF0FF6E80A7}"/>
+                <a16:creationId xmlns:a16="http://schemas.microsoft.com/office/drawing/2014/main" id="{1C53310F-7C78-49BC-8009-B209AEEF2D1E}"/>
               </a:ext>
             </a:extLst>
           </p:cNvPr>
@@ -9572,7 +9772,7 @@
           <p:cNvPr id="10" name="">
             <a:extLst xmlns:a="http://schemas.openxmlformats.org/drawingml/2006/main">
               <a:ext uri="{FF2B5EF4-FFF2-40B4-BE49-F238E27FC236}">
-                <a16:creationId xmlns:a16="http://schemas.microsoft.com/office/drawing/2014/main" id="{892B63A4-60C6-4558-8440-139B3E992970}"/>
+                <a16:creationId xmlns:a16="http://schemas.microsoft.com/office/drawing/2014/main" id="{7F16E671-F006-4BDE-8873-A16F2D055CAA}"/>
               </a:ext>
             </a:extLst>
           </p:cNvPr>
@@ -9629,7 +9829,7 @@
           <p:cNvPr id="11" name="">
             <a:extLst xmlns:a="http://schemas.openxmlformats.org/drawingml/2006/main">
               <a:ext uri="{FF2B5EF4-FFF2-40B4-BE49-F238E27FC236}">
-                <a16:creationId xmlns:a16="http://schemas.microsoft.com/office/drawing/2014/main" id="{36E33B42-2719-4E7B-94C9-D23403649D56}"/>
+                <a16:creationId xmlns:a16="http://schemas.microsoft.com/office/drawing/2014/main" id="{60C7F950-25F1-4DE7-AFC5-ADE060B05BD7}"/>
               </a:ext>
             </a:extLst>
           </p:cNvPr>
@@ -9686,7 +9886,7 @@
           <p:cNvPr id="12" name="">
             <a:extLst xmlns:a="http://schemas.openxmlformats.org/drawingml/2006/main">
               <a:ext uri="{FF2B5EF4-FFF2-40B4-BE49-F238E27FC236}">
-                <a16:creationId xmlns:a16="http://schemas.microsoft.com/office/drawing/2014/main" id="{85714A49-DBAE-4302-9C97-DEC991BDF579}"/>
+                <a16:creationId xmlns:a16="http://schemas.microsoft.com/office/drawing/2014/main" id="{277B88D9-FF15-440C-917A-208548611F73}"/>
               </a:ext>
             </a:extLst>
           </p:cNvPr>
@@ -9718,7 +9918,7 @@
           <p:cNvPr id="13" name="">
             <a:extLst xmlns:a="http://schemas.openxmlformats.org/drawingml/2006/main">
               <a:ext uri="{FF2B5EF4-FFF2-40B4-BE49-F238E27FC236}">
-                <a16:creationId xmlns:a16="http://schemas.microsoft.com/office/drawing/2014/main" id="{034EFDA9-DA96-4538-B246-608B514AD6A4}"/>
+                <a16:creationId xmlns:a16="http://schemas.microsoft.com/office/drawing/2014/main" id="{A915DE71-E4FA-4CE2-ABA4-7AA113DB6ADA}"/>
               </a:ext>
             </a:extLst>
           </p:cNvPr>
@@ -9775,7 +9975,7 @@
           <p:cNvPr id="14" name="">
             <a:extLst xmlns:a="http://schemas.openxmlformats.org/drawingml/2006/main">
               <a:ext uri="{FF2B5EF4-FFF2-40B4-BE49-F238E27FC236}">
-                <a16:creationId xmlns:a16="http://schemas.microsoft.com/office/drawing/2014/main" id="{B6C41A69-5841-4AB1-A09B-DB425F5003F8}"/>
+                <a16:creationId xmlns:a16="http://schemas.microsoft.com/office/drawing/2014/main" id="{67BBA45C-BAF4-4ECD-8CF9-E31FDECC17DB}"/>
               </a:ext>
             </a:extLst>
           </p:cNvPr>
@@ -9830,7 +10030,7 @@
     </p:spTree>
     <p:extLst>
       <p:ext uri="{BB962C8B-B14F-4D97-AF65-F5344CB8AC3E}">
-        <p14:creationId xmlns:p14="http://schemas.microsoft.com/office/powerpoint/2010/main" val="2134678919"/>
+        <p14:creationId xmlns:p14="http://schemas.microsoft.com/office/powerpoint/2010/main" val="923087789"/>
       </p:ext>
     </p:extLst>
   </p:cSld>
@@ -10031,7 +10231,7 @@
           <p:cNvPr id="16" name="">
             <a:extLst xmlns:a="http://schemas.openxmlformats.org/drawingml/2006/main">
               <a:ext uri="{FF2B5EF4-FFF2-40B4-BE49-F238E27FC236}">
-                <a16:creationId xmlns:a16="http://schemas.microsoft.com/office/drawing/2014/main" id="{4704444D-0B8E-4164-AFD3-00CB909B5A6A}"/>
+                <a16:creationId xmlns:a16="http://schemas.microsoft.com/office/drawing/2014/main" id="{E52F726A-9DA6-4262-8787-B3E9264E0A7C}"/>
               </a:ext>
             </a:extLst>
           </p:cNvPr>
@@ -10063,7 +10263,7 @@
           <p:cNvPr id="2" name="">
             <a:extLst xmlns:a="http://schemas.openxmlformats.org/drawingml/2006/main">
               <a:ext uri="{FF2B5EF4-FFF2-40B4-BE49-F238E27FC236}">
-                <a16:creationId xmlns:a16="http://schemas.microsoft.com/office/drawing/2014/main" id="{B60AC6C1-EB82-40F2-AF88-31A039EA8B05}"/>
+                <a16:creationId xmlns:a16="http://schemas.microsoft.com/office/drawing/2014/main" id="{7DC9D8D7-9EED-4CE3-91D4-038BDFECA065}"/>
               </a:ext>
             </a:extLst>
           </p:cNvPr>
@@ -10120,7 +10320,7 @@
           <p:cNvPr id="3" name="">
             <a:extLst xmlns:a="http://schemas.openxmlformats.org/drawingml/2006/main">
               <a:ext uri="{FF2B5EF4-FFF2-40B4-BE49-F238E27FC236}">
-                <a16:creationId xmlns:a16="http://schemas.microsoft.com/office/drawing/2014/main" id="{5C475C5C-4E53-486B-A506-0D40A1C04A9F}"/>
+                <a16:creationId xmlns:a16="http://schemas.microsoft.com/office/drawing/2014/main" id="{686F9955-3375-4568-A495-5A09902DB520}"/>
               </a:ext>
             </a:extLst>
           </p:cNvPr>
@@ -10152,7 +10352,7 @@
           <p:cNvPr id="4" name="">
             <a:extLst xmlns:a="http://schemas.openxmlformats.org/drawingml/2006/main">
               <a:ext uri="{FF2B5EF4-FFF2-40B4-BE49-F238E27FC236}">
-                <a16:creationId xmlns:a16="http://schemas.microsoft.com/office/drawing/2014/main" id="{C44CC58C-B564-4F1A-9B24-78AB58293F49}"/>
+                <a16:creationId xmlns:a16="http://schemas.microsoft.com/office/drawing/2014/main" id="{F200D691-99E7-4401-B6BD-0F8E1FE04DB2}"/>
               </a:ext>
             </a:extLst>
           </p:cNvPr>
@@ -10209,7 +10409,7 @@
           <p:cNvPr id="5" name="">
             <a:extLst xmlns:a="http://schemas.openxmlformats.org/drawingml/2006/main">
               <a:ext uri="{FF2B5EF4-FFF2-40B4-BE49-F238E27FC236}">
-                <a16:creationId xmlns:a16="http://schemas.microsoft.com/office/drawing/2014/main" id="{B07547A6-54FD-4ABA-9C63-63903D239317}"/>
+                <a16:creationId xmlns:a16="http://schemas.microsoft.com/office/drawing/2014/main" id="{4A7A327E-FD16-4259-A8D8-DEAB8EB8B2A6}"/>
               </a:ext>
             </a:extLst>
           </p:cNvPr>
@@ -10266,7 +10466,7 @@
           <p:cNvPr id="6" name="">
             <a:extLst xmlns:a="http://schemas.openxmlformats.org/drawingml/2006/main">
               <a:ext uri="{FF2B5EF4-FFF2-40B4-BE49-F238E27FC236}">
-                <a16:creationId xmlns:a16="http://schemas.microsoft.com/office/drawing/2014/main" id="{57717015-5EEB-482B-869B-03650AEB6466}"/>
+                <a16:creationId xmlns:a16="http://schemas.microsoft.com/office/drawing/2014/main" id="{559D28DC-1F21-424C-BA7F-21D7104784C1}"/>
               </a:ext>
             </a:extLst>
           </p:cNvPr>
@@ -10323,7 +10523,7 @@
           <p:cNvPr id="7" name="">
             <a:extLst xmlns:a="http://schemas.openxmlformats.org/drawingml/2006/main">
               <a:ext uri="{FF2B5EF4-FFF2-40B4-BE49-F238E27FC236}">
-                <a16:creationId xmlns:a16="http://schemas.microsoft.com/office/drawing/2014/main" id="{5A043CAF-A273-4D17-9A1A-57E20991504B}"/>
+                <a16:creationId xmlns:a16="http://schemas.microsoft.com/office/drawing/2014/main" id="{996F8BE3-CC4A-4D45-8564-DDE214EB8B1C}"/>
               </a:ext>
             </a:extLst>
           </p:cNvPr>
@@ -10355,7 +10555,7 @@
           <p:cNvPr id="8" name="">
             <a:extLst xmlns:a="http://schemas.openxmlformats.org/drawingml/2006/main">
               <a:ext uri="{FF2B5EF4-FFF2-40B4-BE49-F238E27FC236}">
-                <a16:creationId xmlns:a16="http://schemas.microsoft.com/office/drawing/2014/main" id="{54CA55D7-2173-492D-A0FD-D93FA7A73CE9}"/>
+                <a16:creationId xmlns:a16="http://schemas.microsoft.com/office/drawing/2014/main" id="{54FF05ED-0FC7-4C4B-AF47-8DF069000BA0}"/>
               </a:ext>
             </a:extLst>
           </p:cNvPr>
@@ -10412,7 +10612,7 @@
           <p:cNvPr id="9" name="">
             <a:extLst xmlns:a="http://schemas.openxmlformats.org/drawingml/2006/main">
               <a:ext uri="{FF2B5EF4-FFF2-40B4-BE49-F238E27FC236}">
-                <a16:creationId xmlns:a16="http://schemas.microsoft.com/office/drawing/2014/main" id="{CBA734B2-7B6B-4725-9682-86356D6E059B}"/>
+                <a16:creationId xmlns:a16="http://schemas.microsoft.com/office/drawing/2014/main" id="{F7A70528-75BF-4D74-8B8F-F86B5B493B3A}"/>
               </a:ext>
             </a:extLst>
           </p:cNvPr>
@@ -10469,7 +10669,7 @@
           <p:cNvPr id="10" name="">
             <a:extLst xmlns:a="http://schemas.openxmlformats.org/drawingml/2006/main">
               <a:ext uri="{FF2B5EF4-FFF2-40B4-BE49-F238E27FC236}">
-                <a16:creationId xmlns:a16="http://schemas.microsoft.com/office/drawing/2014/main" id="{CD581B10-7446-4CB3-A853-679672BC6ED9}"/>
+                <a16:creationId xmlns:a16="http://schemas.microsoft.com/office/drawing/2014/main" id="{EFD19820-36BF-4FB4-95EC-EED2E4776F03}"/>
               </a:ext>
             </a:extLst>
           </p:cNvPr>
@@ -10526,7 +10726,7 @@
           <p:cNvPr id="11" name="">
             <a:extLst xmlns:a="http://schemas.openxmlformats.org/drawingml/2006/main">
               <a:ext uri="{FF2B5EF4-FFF2-40B4-BE49-F238E27FC236}">
-                <a16:creationId xmlns:a16="http://schemas.microsoft.com/office/drawing/2014/main" id="{A5567C43-C528-4763-BCCA-2B5F6642BA9B}"/>
+                <a16:creationId xmlns:a16="http://schemas.microsoft.com/office/drawing/2014/main" id="{D4A4D7E3-BC81-4239-A3B4-9AD0AAD8E6A0}"/>
               </a:ext>
             </a:extLst>
           </p:cNvPr>
@@ -10583,7 +10783,7 @@
           <p:cNvPr id="12" name="">
             <a:extLst xmlns:a="http://schemas.openxmlformats.org/drawingml/2006/main">
               <a:ext uri="{FF2B5EF4-FFF2-40B4-BE49-F238E27FC236}">
-                <a16:creationId xmlns:a16="http://schemas.microsoft.com/office/drawing/2014/main" id="{2CA01689-7F07-4BE8-A5F6-8296BC923898}"/>
+                <a16:creationId xmlns:a16="http://schemas.microsoft.com/office/drawing/2014/main" id="{E3F686B1-13BC-4C3E-A1FA-BB5CF29E1C21}"/>
               </a:ext>
             </a:extLst>
           </p:cNvPr>
@@ -10640,7 +10840,7 @@
           <p:cNvPr id="13" name="">
             <a:extLst xmlns:a="http://schemas.openxmlformats.org/drawingml/2006/main">
               <a:ext uri="{FF2B5EF4-FFF2-40B4-BE49-F238E27FC236}">
-                <a16:creationId xmlns:a16="http://schemas.microsoft.com/office/drawing/2014/main" id="{B337DD74-9D1F-431F-8636-88DC0C0E4940}"/>
+                <a16:creationId xmlns:a16="http://schemas.microsoft.com/office/drawing/2014/main" id="{A64FE65E-40D3-4825-983C-54A9148B5E1E}"/>
               </a:ext>
             </a:extLst>
           </p:cNvPr>
@@ -10697,7 +10897,7 @@
           <p:cNvPr id="14" name="">
             <a:extLst xmlns:a="http://schemas.openxmlformats.org/drawingml/2006/main">
               <a:ext uri="{FF2B5EF4-FFF2-40B4-BE49-F238E27FC236}">
-                <a16:creationId xmlns:a16="http://schemas.microsoft.com/office/drawing/2014/main" id="{AD7F1B67-2E70-49DE-9F9A-B6D669019574}"/>
+                <a16:creationId xmlns:a16="http://schemas.microsoft.com/office/drawing/2014/main" id="{7DF6B9ED-F254-464C-A6FC-467A9DDFFCF5}"/>
               </a:ext>
             </a:extLst>
           </p:cNvPr>
@@ -10754,7 +10954,7 @@
           <p:cNvPr id="15" name="">
             <a:extLst xmlns:a="http://schemas.openxmlformats.org/drawingml/2006/main">
               <a:ext uri="{FF2B5EF4-FFF2-40B4-BE49-F238E27FC236}">
-                <a16:creationId xmlns:a16="http://schemas.microsoft.com/office/drawing/2014/main" id="{7B5CBE07-56AF-473A-80C6-01CB2245B038}"/>
+                <a16:creationId xmlns:a16="http://schemas.microsoft.com/office/drawing/2014/main" id="{1F30E0DA-E570-4D63-859B-B694B091EB90}"/>
               </a:ext>
             </a:extLst>
           </p:cNvPr>
@@ -10809,7 +11009,7 @@
     </p:spTree>
     <p:extLst>
       <p:ext uri="{BB962C8B-B14F-4D97-AF65-F5344CB8AC3E}">
-        <p14:creationId xmlns:p14="http://schemas.microsoft.com/office/powerpoint/2010/main" val="210613574"/>
+        <p14:creationId xmlns:p14="http://schemas.microsoft.com/office/powerpoint/2010/main" val="1408692528"/>
       </p:ext>
     </p:extLst>
   </p:cSld>
@@ -10964,7 +11164,7 @@
           <p:cNvPr id="16" name="">
             <a:extLst xmlns:a="http://schemas.openxmlformats.org/drawingml/2006/main">
               <a:ext uri="{FF2B5EF4-FFF2-40B4-BE49-F238E27FC236}">
-                <a16:creationId xmlns:a16="http://schemas.microsoft.com/office/drawing/2014/main" id="{DF75CA25-9F65-417D-BEB0-C93C901DC3BD}"/>
+                <a16:creationId xmlns:a16="http://schemas.microsoft.com/office/drawing/2014/main" id="{76475E5B-7C6D-49DB-86EB-DF6DE8DF9AD0}"/>
               </a:ext>
             </a:extLst>
           </p:cNvPr>
@@ -10996,7 +11196,7 @@
           <p:cNvPr id="2" name="">
             <a:extLst xmlns:a="http://schemas.openxmlformats.org/drawingml/2006/main">
               <a:ext uri="{FF2B5EF4-FFF2-40B4-BE49-F238E27FC236}">
-                <a16:creationId xmlns:a16="http://schemas.microsoft.com/office/drawing/2014/main" id="{B45BD689-E152-48DB-A581-2D8909E2BB95}"/>
+                <a16:creationId xmlns:a16="http://schemas.microsoft.com/office/drawing/2014/main" id="{4A6FF347-2BF2-4F4F-B857-88C69B805B6B}"/>
               </a:ext>
             </a:extLst>
           </p:cNvPr>
@@ -11053,7 +11253,7 @@
           <p:cNvPr id="3" name="">
             <a:extLst xmlns:a="http://schemas.openxmlformats.org/drawingml/2006/main">
               <a:ext uri="{FF2B5EF4-FFF2-40B4-BE49-F238E27FC236}">
-                <a16:creationId xmlns:a16="http://schemas.microsoft.com/office/drawing/2014/main" id="{D52D595B-DC51-4E54-AD57-D2DAF03CB02B}"/>
+                <a16:creationId xmlns:a16="http://schemas.microsoft.com/office/drawing/2014/main" id="{1576613F-7C6B-47F6-BE69-B0F18965F332}"/>
               </a:ext>
             </a:extLst>
           </p:cNvPr>
@@ -11085,7 +11285,7 @@
           <p:cNvPr id="4" name="">
             <a:extLst xmlns:a="http://schemas.openxmlformats.org/drawingml/2006/main">
               <a:ext uri="{FF2B5EF4-FFF2-40B4-BE49-F238E27FC236}">
-                <a16:creationId xmlns:a16="http://schemas.microsoft.com/office/drawing/2014/main" id="{1A402F6C-0D2A-4D1C-8728-D7924FA15095}"/>
+                <a16:creationId xmlns:a16="http://schemas.microsoft.com/office/drawing/2014/main" id="{D2FFE16F-E340-42BB-8D0A-ED1116318F5E}"/>
               </a:ext>
             </a:extLst>
           </p:cNvPr>
@@ -11142,7 +11342,7 @@
           <p:cNvPr id="5" name="">
             <a:extLst xmlns:a="http://schemas.openxmlformats.org/drawingml/2006/main">
               <a:ext uri="{FF2B5EF4-FFF2-40B4-BE49-F238E27FC236}">
-                <a16:creationId xmlns:a16="http://schemas.microsoft.com/office/drawing/2014/main" id="{972D3804-C133-4F7B-BF92-34C317068912}"/>
+                <a16:creationId xmlns:a16="http://schemas.microsoft.com/office/drawing/2014/main" id="{0F0C839B-97CA-4AA0-8E49-C7DD90978AC7}"/>
               </a:ext>
             </a:extLst>
           </p:cNvPr>
@@ -11199,7 +11399,7 @@
           <p:cNvPr id="6" name="">
             <a:extLst xmlns:a="http://schemas.openxmlformats.org/drawingml/2006/main">
               <a:ext uri="{FF2B5EF4-FFF2-40B4-BE49-F238E27FC236}">
-                <a16:creationId xmlns:a16="http://schemas.microsoft.com/office/drawing/2014/main" id="{6D8C5420-F717-4ABA-843C-CE2AD4615A59}"/>
+                <a16:creationId xmlns:a16="http://schemas.microsoft.com/office/drawing/2014/main" id="{8F9E9262-C63D-414D-A01A-4BB5FF5BDE09}"/>
               </a:ext>
             </a:extLst>
           </p:cNvPr>
@@ -11256,7 +11456,7 @@
           <p:cNvPr id="7" name="">
             <a:extLst xmlns:a="http://schemas.openxmlformats.org/drawingml/2006/main">
               <a:ext uri="{FF2B5EF4-FFF2-40B4-BE49-F238E27FC236}">
-                <a16:creationId xmlns:a16="http://schemas.microsoft.com/office/drawing/2014/main" id="{D8350243-4233-41AC-8B29-F8140FEC2354}"/>
+                <a16:creationId xmlns:a16="http://schemas.microsoft.com/office/drawing/2014/main" id="{03427AEC-A963-4A30-97EC-23DFED0734B3}"/>
               </a:ext>
             </a:extLst>
           </p:cNvPr>
@@ -11288,7 +11488,7 @@
           <p:cNvPr id="8" name="">
             <a:extLst xmlns:a="http://schemas.openxmlformats.org/drawingml/2006/main">
               <a:ext uri="{FF2B5EF4-FFF2-40B4-BE49-F238E27FC236}">
-                <a16:creationId xmlns:a16="http://schemas.microsoft.com/office/drawing/2014/main" id="{F79864A6-B31A-4D96-AC3A-903E7C5AE0FE}"/>
+                <a16:creationId xmlns:a16="http://schemas.microsoft.com/office/drawing/2014/main" id="{154C5902-7384-4B28-93B9-575E0F66A665}"/>
               </a:ext>
             </a:extLst>
           </p:cNvPr>
@@ -11345,7 +11545,7 @@
           <p:cNvPr id="9" name="">
             <a:extLst xmlns:a="http://schemas.openxmlformats.org/drawingml/2006/main">
               <a:ext uri="{FF2B5EF4-FFF2-40B4-BE49-F238E27FC236}">
-                <a16:creationId xmlns:a16="http://schemas.microsoft.com/office/drawing/2014/main" id="{A1B15D12-C133-4802-B80B-93E19C409D51}"/>
+                <a16:creationId xmlns:a16="http://schemas.microsoft.com/office/drawing/2014/main" id="{427069EA-613C-4997-A31A-13A8F20A4179}"/>
               </a:ext>
             </a:extLst>
           </p:cNvPr>
@@ -11406,7 +11606,7 @@
           <p:nvPr/>
         </p:nvPicPr>
         <p:blipFill>
-          <a:blip xmlns:r="http://schemas.openxmlformats.org/officeDocument/2006/relationships" xmlns:a="http://schemas.openxmlformats.org/drawingml/2006/main" r:embed="R695637b2a0af4dd0"/>
+          <a:blip xmlns:r="http://schemas.openxmlformats.org/officeDocument/2006/relationships" xmlns:a="http://schemas.openxmlformats.org/drawingml/2006/main" r:embed="Rca319b93bc484b78"/>
           <a:stretch xmlns:a="http://schemas.openxmlformats.org/drawingml/2006/main"/>
         </p:blipFill>
         <p:spPr>
@@ -11424,7 +11624,7 @@
           <p:cNvPr id="11" name="">
             <a:extLst xmlns:a="http://schemas.openxmlformats.org/drawingml/2006/main">
               <a:ext uri="{FF2B5EF4-FFF2-40B4-BE49-F238E27FC236}">
-                <a16:creationId xmlns:a16="http://schemas.microsoft.com/office/drawing/2014/main" id="{32503F42-5F91-438C-A8FC-F4FB631C632C}"/>
+                <a16:creationId xmlns:a16="http://schemas.microsoft.com/office/drawing/2014/main" id="{8C3D0B26-E395-4194-8E51-6E59B4306B70}"/>
               </a:ext>
             </a:extLst>
           </p:cNvPr>
@@ -11481,7 +11681,7 @@
           <p:cNvPr id="12" name="">
             <a:extLst xmlns:a="http://schemas.openxmlformats.org/drawingml/2006/main">
               <a:ext uri="{FF2B5EF4-FFF2-40B4-BE49-F238E27FC236}">
-                <a16:creationId xmlns:a16="http://schemas.microsoft.com/office/drawing/2014/main" id="{86A537A4-EE88-4E45-886B-19A066D0CD3B}"/>
+                <a16:creationId xmlns:a16="http://schemas.microsoft.com/office/drawing/2014/main" id="{51D25C25-3FFB-4C67-9038-37DA27F523ED}"/>
               </a:ext>
             </a:extLst>
           </p:cNvPr>
@@ -11538,7 +11738,7 @@
           <p:cNvPr id="13" name="">
             <a:extLst xmlns:a="http://schemas.openxmlformats.org/drawingml/2006/main">
               <a:ext uri="{FF2B5EF4-FFF2-40B4-BE49-F238E27FC236}">
-                <a16:creationId xmlns:a16="http://schemas.microsoft.com/office/drawing/2014/main" id="{7B6CC52A-8D9E-42DC-BD28-04C71DA6336B}"/>
+                <a16:creationId xmlns:a16="http://schemas.microsoft.com/office/drawing/2014/main" id="{64D487D8-E5D0-4589-9D5B-EF34A882D32E}"/>
               </a:ext>
             </a:extLst>
           </p:cNvPr>
@@ -11570,7 +11770,7 @@
           <p:cNvPr id="14" name="">
             <a:extLst xmlns:a="http://schemas.openxmlformats.org/drawingml/2006/main">
               <a:ext uri="{FF2B5EF4-FFF2-40B4-BE49-F238E27FC236}">
-                <a16:creationId xmlns:a16="http://schemas.microsoft.com/office/drawing/2014/main" id="{D7A18481-18F1-49D6-842A-0325FD5167F8}"/>
+                <a16:creationId xmlns:a16="http://schemas.microsoft.com/office/drawing/2014/main" id="{07644199-629C-43EC-BDF2-AB1F47A88930}"/>
               </a:ext>
             </a:extLst>
           </p:cNvPr>
@@ -11627,7 +11827,7 @@
           <p:cNvPr id="15" name="">
             <a:extLst xmlns:a="http://schemas.openxmlformats.org/drawingml/2006/main">
               <a:ext uri="{FF2B5EF4-FFF2-40B4-BE49-F238E27FC236}">
-                <a16:creationId xmlns:a16="http://schemas.microsoft.com/office/drawing/2014/main" id="{FE25CC5B-0689-4ED5-BD0D-C9CE8A13F827}"/>
+                <a16:creationId xmlns:a16="http://schemas.microsoft.com/office/drawing/2014/main" id="{14D3C80E-4482-4FFD-AD40-248E5607CBCF}"/>
               </a:ext>
             </a:extLst>
           </p:cNvPr>
@@ -11682,7 +11882,7 @@
     </p:spTree>
     <p:extLst>
       <p:ext uri="{BB962C8B-B14F-4D97-AF65-F5344CB8AC3E}">
-        <p14:creationId xmlns:p14="http://schemas.microsoft.com/office/powerpoint/2010/main" val="216864766"/>
+        <p14:creationId xmlns:p14="http://schemas.microsoft.com/office/powerpoint/2010/main" val="1021169327"/>
       </p:ext>
     </p:extLst>
   </p:cSld>
@@ -11837,7 +12037,7 @@
           <p:cNvPr id="23" name="">
             <a:extLst xmlns:a="http://schemas.openxmlformats.org/drawingml/2006/main">
               <a:ext uri="{FF2B5EF4-FFF2-40B4-BE49-F238E27FC236}">
-                <a16:creationId xmlns:a16="http://schemas.microsoft.com/office/drawing/2014/main" id="{91F2325C-E2CE-4771-AFF0-FCE8C465A44A}"/>
+                <a16:creationId xmlns:a16="http://schemas.microsoft.com/office/drawing/2014/main" id="{A3A33391-ECCC-4886-A291-A3A519158DA1}"/>
               </a:ext>
             </a:extLst>
           </p:cNvPr>
@@ -11869,7 +12069,7 @@
           <p:cNvPr id="2" name="">
             <a:extLst xmlns:a="http://schemas.openxmlformats.org/drawingml/2006/main">
               <a:ext uri="{FF2B5EF4-FFF2-40B4-BE49-F238E27FC236}">
-                <a16:creationId xmlns:a16="http://schemas.microsoft.com/office/drawing/2014/main" id="{2AFC6F90-C15C-4451-822E-15E04E66EECC}"/>
+                <a16:creationId xmlns:a16="http://schemas.microsoft.com/office/drawing/2014/main" id="{66705484-7DD1-4DEC-9FC6-CA4F31FBE1C0}"/>
               </a:ext>
             </a:extLst>
           </p:cNvPr>
@@ -11926,7 +12126,7 @@
           <p:cNvPr id="3" name="">
             <a:extLst xmlns:a="http://schemas.openxmlformats.org/drawingml/2006/main">
               <a:ext uri="{FF2B5EF4-FFF2-40B4-BE49-F238E27FC236}">
-                <a16:creationId xmlns:a16="http://schemas.microsoft.com/office/drawing/2014/main" id="{C2BF284A-0ED4-4332-BA7A-53E44ACC73FD}"/>
+                <a16:creationId xmlns:a16="http://schemas.microsoft.com/office/drawing/2014/main" id="{8B9E4C3B-1ED3-463E-8244-64AAFB358058}"/>
               </a:ext>
             </a:extLst>
           </p:cNvPr>
@@ -11958,7 +12158,7 @@
           <p:cNvPr id="4" name="">
             <a:extLst xmlns:a="http://schemas.openxmlformats.org/drawingml/2006/main">
               <a:ext uri="{FF2B5EF4-FFF2-40B4-BE49-F238E27FC236}">
-                <a16:creationId xmlns:a16="http://schemas.microsoft.com/office/drawing/2014/main" id="{CAF65EC6-84C5-47A0-AE9D-09B40B6C1940}"/>
+                <a16:creationId xmlns:a16="http://schemas.microsoft.com/office/drawing/2014/main" id="{6EBF3E83-1814-458C-8E2B-DD8C079F7D0E}"/>
               </a:ext>
             </a:extLst>
           </p:cNvPr>
@@ -12015,7 +12215,7 @@
           <p:cNvPr id="5" name="">
             <a:extLst xmlns:a="http://schemas.openxmlformats.org/drawingml/2006/main">
               <a:ext uri="{FF2B5EF4-FFF2-40B4-BE49-F238E27FC236}">
-                <a16:creationId xmlns:a16="http://schemas.microsoft.com/office/drawing/2014/main" id="{28EDA038-CB24-458B-A7E7-49D414977D85}"/>
+                <a16:creationId xmlns:a16="http://schemas.microsoft.com/office/drawing/2014/main" id="{F1704340-CD22-46AF-B6A9-F2A1330D2C2A}"/>
               </a:ext>
             </a:extLst>
           </p:cNvPr>
@@ -12072,7 +12272,7 @@
           <p:cNvPr id="6" name="">
             <a:extLst xmlns:a="http://schemas.openxmlformats.org/drawingml/2006/main">
               <a:ext uri="{FF2B5EF4-FFF2-40B4-BE49-F238E27FC236}">
-                <a16:creationId xmlns:a16="http://schemas.microsoft.com/office/drawing/2014/main" id="{D98DA55B-F791-4BCE-95C6-41527A8C15F1}"/>
+                <a16:creationId xmlns:a16="http://schemas.microsoft.com/office/drawing/2014/main" id="{94924593-D678-46B6-81EE-47C2EF860FAA}"/>
               </a:ext>
             </a:extLst>
           </p:cNvPr>
@@ -12129,7 +12329,7 @@
           <p:cNvPr id="7" name="">
             <a:extLst xmlns:a="http://schemas.openxmlformats.org/drawingml/2006/main">
               <a:ext uri="{FF2B5EF4-FFF2-40B4-BE49-F238E27FC236}">
-                <a16:creationId xmlns:a16="http://schemas.microsoft.com/office/drawing/2014/main" id="{017AD8C7-E6FF-4E9A-8C60-9F5F09F669E3}"/>
+                <a16:creationId xmlns:a16="http://schemas.microsoft.com/office/drawing/2014/main" id="{4EF7F4B2-2F34-4401-80B2-B28FADBA2ABC}"/>
               </a:ext>
             </a:extLst>
           </p:cNvPr>
@@ -12161,7 +12361,7 @@
           <p:cNvPr id="8" name="">
             <a:extLst xmlns:a="http://schemas.openxmlformats.org/drawingml/2006/main">
               <a:ext uri="{FF2B5EF4-FFF2-40B4-BE49-F238E27FC236}">
-                <a16:creationId xmlns:a16="http://schemas.microsoft.com/office/drawing/2014/main" id="{28E1954A-74E2-4272-82DC-3CCE5091FD49}"/>
+                <a16:creationId xmlns:a16="http://schemas.microsoft.com/office/drawing/2014/main" id="{FA35B11A-3108-4484-BB44-D1C110A14A2A}"/>
               </a:ext>
             </a:extLst>
           </p:cNvPr>
@@ -12218,7 +12418,7 @@
           <p:cNvPr id="9" name="">
             <a:extLst xmlns:a="http://schemas.openxmlformats.org/drawingml/2006/main">
               <a:ext uri="{FF2B5EF4-FFF2-40B4-BE49-F238E27FC236}">
-                <a16:creationId xmlns:a16="http://schemas.microsoft.com/office/drawing/2014/main" id="{910AF854-4900-424E-9E67-F92C7EF3CAA2}"/>
+                <a16:creationId xmlns:a16="http://schemas.microsoft.com/office/drawing/2014/main" id="{320C684D-58F8-41C7-A74B-538CFBC2A78E}"/>
               </a:ext>
             </a:extLst>
           </p:cNvPr>
@@ -12275,7 +12475,7 @@
           <p:cNvPr id="10" name="">
             <a:extLst xmlns:a="http://schemas.openxmlformats.org/drawingml/2006/main">
               <a:ext uri="{FF2B5EF4-FFF2-40B4-BE49-F238E27FC236}">
-                <a16:creationId xmlns:a16="http://schemas.microsoft.com/office/drawing/2014/main" id="{FFC03449-2F82-49B7-8BDF-155EC99A9300}"/>
+                <a16:creationId xmlns:a16="http://schemas.microsoft.com/office/drawing/2014/main" id="{466EE191-DAD5-404A-940A-65913353B2F7}"/>
               </a:ext>
             </a:extLst>
           </p:cNvPr>
@@ -12309,7 +12509,7 @@
           <p:cNvPr id="11" name="">
             <a:extLst xmlns:a="http://schemas.openxmlformats.org/drawingml/2006/main">
               <a:ext uri="{FF2B5EF4-FFF2-40B4-BE49-F238E27FC236}">
-                <a16:creationId xmlns:a16="http://schemas.microsoft.com/office/drawing/2014/main" id="{BEF2BEEA-3C00-4F4B-A601-65C42F1804E8}"/>
+                <a16:creationId xmlns:a16="http://schemas.microsoft.com/office/drawing/2014/main" id="{F25BA80E-2F25-4DDA-B49F-B7515219611E}"/>
               </a:ext>
             </a:extLst>
           </p:cNvPr>
@@ -12341,7 +12541,7 @@
           <p:cNvPr id="12" name="">
             <a:extLst xmlns:a="http://schemas.openxmlformats.org/drawingml/2006/main">
               <a:ext uri="{FF2B5EF4-FFF2-40B4-BE49-F238E27FC236}">
-                <a16:creationId xmlns:a16="http://schemas.microsoft.com/office/drawing/2014/main" id="{52808EDA-237F-40F4-944E-D5537E63417E}"/>
+                <a16:creationId xmlns:a16="http://schemas.microsoft.com/office/drawing/2014/main" id="{49D87119-EF1D-4E9D-9249-18AD5A4D97F4}"/>
               </a:ext>
             </a:extLst>
           </p:cNvPr>
@@ -12398,7 +12598,7 @@
           <p:cNvPr id="13" name="">
             <a:extLst xmlns:a="http://schemas.openxmlformats.org/drawingml/2006/main">
               <a:ext uri="{FF2B5EF4-FFF2-40B4-BE49-F238E27FC236}">
-                <a16:creationId xmlns:a16="http://schemas.microsoft.com/office/drawing/2014/main" id="{696C0059-70A0-4688-90C1-924D8427CE8E}"/>
+                <a16:creationId xmlns:a16="http://schemas.microsoft.com/office/drawing/2014/main" id="{96CB1466-A878-4A29-9BE1-D77328C63989}"/>
               </a:ext>
             </a:extLst>
           </p:cNvPr>
@@ -12455,7 +12655,7 @@
           <p:cNvPr id="14" name="">
             <a:extLst xmlns:a="http://schemas.openxmlformats.org/drawingml/2006/main">
               <a:ext uri="{FF2B5EF4-FFF2-40B4-BE49-F238E27FC236}">
-                <a16:creationId xmlns:a16="http://schemas.microsoft.com/office/drawing/2014/main" id="{C0693FB0-4EBF-4FE9-9647-6B50CCF22E61}"/>
+                <a16:creationId xmlns:a16="http://schemas.microsoft.com/office/drawing/2014/main" id="{2878D006-2E08-43D5-BF1A-DB6A6F7A7FF9}"/>
               </a:ext>
             </a:extLst>
           </p:cNvPr>
@@ -12489,7 +12689,7 @@
           <p:cNvPr id="15" name="">
             <a:extLst xmlns:a="http://schemas.openxmlformats.org/drawingml/2006/main">
               <a:ext uri="{FF2B5EF4-FFF2-40B4-BE49-F238E27FC236}">
-                <a16:creationId xmlns:a16="http://schemas.microsoft.com/office/drawing/2014/main" id="{E9AB76B2-2B43-49CD-95B0-1A0B168A769F}"/>
+                <a16:creationId xmlns:a16="http://schemas.microsoft.com/office/drawing/2014/main" id="{0C818BC4-30F7-4256-BAFE-300B7D2E796A}"/>
               </a:ext>
             </a:extLst>
           </p:cNvPr>
@@ -12521,7 +12721,7 @@
           <p:cNvPr id="16" name="">
             <a:extLst xmlns:a="http://schemas.openxmlformats.org/drawingml/2006/main">
               <a:ext uri="{FF2B5EF4-FFF2-40B4-BE49-F238E27FC236}">
-                <a16:creationId xmlns:a16="http://schemas.microsoft.com/office/drawing/2014/main" id="{58F17B93-7229-4321-AE4F-93A5BE4615D3}"/>
+                <a16:creationId xmlns:a16="http://schemas.microsoft.com/office/drawing/2014/main" id="{B1118BED-D0C8-4220-A8EC-30BDF8AA5F07}"/>
               </a:ext>
             </a:extLst>
           </p:cNvPr>
@@ -12578,7 +12778,7 @@
           <p:cNvPr id="17" name="">
             <a:extLst xmlns:a="http://schemas.openxmlformats.org/drawingml/2006/main">
               <a:ext uri="{FF2B5EF4-FFF2-40B4-BE49-F238E27FC236}">
-                <a16:creationId xmlns:a16="http://schemas.microsoft.com/office/drawing/2014/main" id="{255B4D14-41C7-4EF2-946D-B6C6640C0BB6}"/>
+                <a16:creationId xmlns:a16="http://schemas.microsoft.com/office/drawing/2014/main" id="{0CDCEC71-8B47-4464-9351-43055DE2D3B2}"/>
               </a:ext>
             </a:extLst>
           </p:cNvPr>
@@ -12635,7 +12835,7 @@
           <p:cNvPr id="18" name="">
             <a:extLst xmlns:a="http://schemas.openxmlformats.org/drawingml/2006/main">
               <a:ext uri="{FF2B5EF4-FFF2-40B4-BE49-F238E27FC236}">
-                <a16:creationId xmlns:a16="http://schemas.microsoft.com/office/drawing/2014/main" id="{13BEF113-4986-4992-BC5D-088530DD09F0}"/>
+                <a16:creationId xmlns:a16="http://schemas.microsoft.com/office/drawing/2014/main" id="{974C5771-1E20-489F-9AA5-822F356BA363}"/>
               </a:ext>
             </a:extLst>
           </p:cNvPr>
@@ -12669,7 +12869,7 @@
           <p:cNvPr id="19" name="">
             <a:extLst xmlns:a="http://schemas.openxmlformats.org/drawingml/2006/main">
               <a:ext uri="{FF2B5EF4-FFF2-40B4-BE49-F238E27FC236}">
-                <a16:creationId xmlns:a16="http://schemas.microsoft.com/office/drawing/2014/main" id="{98320951-FE05-4138-8885-D72E6DC8A505}"/>
+                <a16:creationId xmlns:a16="http://schemas.microsoft.com/office/drawing/2014/main" id="{B492E8FD-E17C-4F3F-A270-9719185B9207}"/>
               </a:ext>
             </a:extLst>
           </p:cNvPr>
@@ -12701,7 +12901,7 @@
           <p:cNvPr id="20" name="">
             <a:extLst xmlns:a="http://schemas.openxmlformats.org/drawingml/2006/main">
               <a:ext uri="{FF2B5EF4-FFF2-40B4-BE49-F238E27FC236}">
-                <a16:creationId xmlns:a16="http://schemas.microsoft.com/office/drawing/2014/main" id="{5353428E-D01E-4C9D-948E-3980323AC7B8}"/>
+                <a16:creationId xmlns:a16="http://schemas.microsoft.com/office/drawing/2014/main" id="{652CB5B7-3992-4797-91F6-83FBF3034E33}"/>
               </a:ext>
             </a:extLst>
           </p:cNvPr>
@@ -12758,7 +12958,7 @@
           <p:cNvPr id="21" name="">
             <a:extLst xmlns:a="http://schemas.openxmlformats.org/drawingml/2006/main">
               <a:ext uri="{FF2B5EF4-FFF2-40B4-BE49-F238E27FC236}">
-                <a16:creationId xmlns:a16="http://schemas.microsoft.com/office/drawing/2014/main" id="{5B61831C-5B90-4FA4-A14F-BD2E82A65362}"/>
+                <a16:creationId xmlns:a16="http://schemas.microsoft.com/office/drawing/2014/main" id="{AB02AE6B-7855-4BAA-A30C-A867B33572A3}"/>
               </a:ext>
             </a:extLst>
           </p:cNvPr>
@@ -12815,7 +13015,7 @@
           <p:cNvPr id="22" name="">
             <a:extLst xmlns:a="http://schemas.openxmlformats.org/drawingml/2006/main">
               <a:ext uri="{FF2B5EF4-FFF2-40B4-BE49-F238E27FC236}">
-                <a16:creationId xmlns:a16="http://schemas.microsoft.com/office/drawing/2014/main" id="{FDCB37D2-028E-4344-98AC-36D69FBB0C29}"/>
+                <a16:creationId xmlns:a16="http://schemas.microsoft.com/office/drawing/2014/main" id="{4E13597E-B580-4DBF-9CA7-5470DC7C075E}"/>
               </a:ext>
             </a:extLst>
           </p:cNvPr>
@@ -12870,7 +13070,7 @@
     </p:spTree>
     <p:extLst>
       <p:ext uri="{BB962C8B-B14F-4D97-AF65-F5344CB8AC3E}">
-        <p14:creationId xmlns:p14="http://schemas.microsoft.com/office/powerpoint/2010/main" val="818946400"/>
+        <p14:creationId xmlns:p14="http://schemas.microsoft.com/office/powerpoint/2010/main" val="1567051107"/>
       </p:ext>
     </p:extLst>
   </p:cSld>
@@ -13071,7 +13271,7 @@
           <p:cNvPr id="22" name="">
             <a:extLst xmlns:a="http://schemas.openxmlformats.org/drawingml/2006/main">
               <a:ext uri="{FF2B5EF4-FFF2-40B4-BE49-F238E27FC236}">
-                <a16:creationId xmlns:a16="http://schemas.microsoft.com/office/drawing/2014/main" id="{A542A553-644C-4C1C-A4D9-6781D2E51065}"/>
+                <a16:creationId xmlns:a16="http://schemas.microsoft.com/office/drawing/2014/main" id="{4E3F5A98-8451-4BC7-B19F-853679A1CCAD}"/>
               </a:ext>
             </a:extLst>
           </p:cNvPr>
@@ -13103,7 +13303,7 @@
           <p:cNvPr id="2" name="">
             <a:extLst xmlns:a="http://schemas.openxmlformats.org/drawingml/2006/main">
               <a:ext uri="{FF2B5EF4-FFF2-40B4-BE49-F238E27FC236}">
-                <a16:creationId xmlns:a16="http://schemas.microsoft.com/office/drawing/2014/main" id="{5C9CA4AC-B625-4159-9FB6-ABA00FC59ED1}"/>
+                <a16:creationId xmlns:a16="http://schemas.microsoft.com/office/drawing/2014/main" id="{72AF429A-68BC-4754-B174-75E9F0751B00}"/>
               </a:ext>
             </a:extLst>
           </p:cNvPr>
@@ -13160,7 +13360,7 @@
           <p:cNvPr id="3" name="">
             <a:extLst xmlns:a="http://schemas.openxmlformats.org/drawingml/2006/main">
               <a:ext uri="{FF2B5EF4-FFF2-40B4-BE49-F238E27FC236}">
-                <a16:creationId xmlns:a16="http://schemas.microsoft.com/office/drawing/2014/main" id="{25FCF2B2-3DCF-40D2-803C-359499EC76A3}"/>
+                <a16:creationId xmlns:a16="http://schemas.microsoft.com/office/drawing/2014/main" id="{6411D7A0-B617-485D-83FD-F5C0253CCE9A}"/>
               </a:ext>
             </a:extLst>
           </p:cNvPr>
@@ -13192,7 +13392,7 @@
           <p:cNvPr id="4" name="">
             <a:extLst xmlns:a="http://schemas.openxmlformats.org/drawingml/2006/main">
               <a:ext uri="{FF2B5EF4-FFF2-40B4-BE49-F238E27FC236}">
-                <a16:creationId xmlns:a16="http://schemas.microsoft.com/office/drawing/2014/main" id="{D496F993-E04B-4D7D-AE40-C6C6D44E1A1C}"/>
+                <a16:creationId xmlns:a16="http://schemas.microsoft.com/office/drawing/2014/main" id="{1B49D8A8-423F-4109-A93B-367F1DAEAC1E}"/>
               </a:ext>
             </a:extLst>
           </p:cNvPr>
@@ -13249,7 +13449,7 @@
           <p:cNvPr id="5" name="">
             <a:extLst xmlns:a="http://schemas.openxmlformats.org/drawingml/2006/main">
               <a:ext uri="{FF2B5EF4-FFF2-40B4-BE49-F238E27FC236}">
-                <a16:creationId xmlns:a16="http://schemas.microsoft.com/office/drawing/2014/main" id="{0F7396E5-1738-4546-974E-A7B796227288}"/>
+                <a16:creationId xmlns:a16="http://schemas.microsoft.com/office/drawing/2014/main" id="{55A4BD20-97BC-43B0-9506-478337C5FD78}"/>
               </a:ext>
             </a:extLst>
           </p:cNvPr>
@@ -13306,7 +13506,7 @@
           <p:cNvPr id="6" name="">
             <a:extLst xmlns:a="http://schemas.openxmlformats.org/drawingml/2006/main">
               <a:ext uri="{FF2B5EF4-FFF2-40B4-BE49-F238E27FC236}">
-                <a16:creationId xmlns:a16="http://schemas.microsoft.com/office/drawing/2014/main" id="{6C8E3081-44A3-4768-95CF-9511F342AED8}"/>
+                <a16:creationId xmlns:a16="http://schemas.microsoft.com/office/drawing/2014/main" id="{BF0C4914-7898-4F64-BB46-B77747473573}"/>
               </a:ext>
             </a:extLst>
           </p:cNvPr>
@@ -13363,7 +13563,7 @@
           <p:cNvPr id="7" name="">
             <a:extLst xmlns:a="http://schemas.openxmlformats.org/drawingml/2006/main">
               <a:ext uri="{FF2B5EF4-FFF2-40B4-BE49-F238E27FC236}">
-                <a16:creationId xmlns:a16="http://schemas.microsoft.com/office/drawing/2014/main" id="{E9199A0B-63BF-43A7-AD07-40D5E61683D8}"/>
+                <a16:creationId xmlns:a16="http://schemas.microsoft.com/office/drawing/2014/main" id="{21D06BD7-2370-47DF-B8B0-1498B7527057}"/>
               </a:ext>
             </a:extLst>
           </p:cNvPr>
@@ -13395,7 +13595,7 @@
           <p:cNvPr id="8" name="">
             <a:extLst xmlns:a="http://schemas.openxmlformats.org/drawingml/2006/main">
               <a:ext uri="{FF2B5EF4-FFF2-40B4-BE49-F238E27FC236}">
-                <a16:creationId xmlns:a16="http://schemas.microsoft.com/office/drawing/2014/main" id="{6E8A3E33-605A-4FDA-B4BA-9162C6203EAC}"/>
+                <a16:creationId xmlns:a16="http://schemas.microsoft.com/office/drawing/2014/main" id="{85BFA1FB-22DD-457E-AD08-CF8EA9D5CB1E}"/>
               </a:ext>
             </a:extLst>
           </p:cNvPr>
@@ -13452,7 +13652,7 @@
           <p:cNvPr id="9" name="">
             <a:extLst xmlns:a="http://schemas.openxmlformats.org/drawingml/2006/main">
               <a:ext uri="{FF2B5EF4-FFF2-40B4-BE49-F238E27FC236}">
-                <a16:creationId xmlns:a16="http://schemas.microsoft.com/office/drawing/2014/main" id="{06E01E62-C9A3-41B0-A51A-CBB89A5C7B7F}"/>
+                <a16:creationId xmlns:a16="http://schemas.microsoft.com/office/drawing/2014/main" id="{83BD997F-16F8-44FD-928F-F846BEFC08E3}"/>
               </a:ext>
             </a:extLst>
           </p:cNvPr>
@@ -13509,7 +13709,7 @@
           <p:cNvPr id="10" name="">
             <a:extLst xmlns:a="http://schemas.openxmlformats.org/drawingml/2006/main">
               <a:ext uri="{FF2B5EF4-FFF2-40B4-BE49-F238E27FC236}">
-                <a16:creationId xmlns:a16="http://schemas.microsoft.com/office/drawing/2014/main" id="{7CD62EB8-F24E-45D5-AB1E-729ED98F65D3}"/>
+                <a16:creationId xmlns:a16="http://schemas.microsoft.com/office/drawing/2014/main" id="{24187D1B-1EA9-4676-AB40-91CEA797C589}"/>
               </a:ext>
             </a:extLst>
           </p:cNvPr>
@@ -13543,7 +13743,7 @@
           <p:cNvPr id="11" name="">
             <a:extLst xmlns:a="http://schemas.openxmlformats.org/drawingml/2006/main">
               <a:ext uri="{FF2B5EF4-FFF2-40B4-BE49-F238E27FC236}">
-                <a16:creationId xmlns:a16="http://schemas.microsoft.com/office/drawing/2014/main" id="{6BB8F2EA-8733-4A50-B834-797B74B1252A}"/>
+                <a16:creationId xmlns:a16="http://schemas.microsoft.com/office/drawing/2014/main" id="{4C9B74F2-3887-40EE-A4CA-823EF8E26CCB}"/>
               </a:ext>
             </a:extLst>
           </p:cNvPr>
@@ -13575,7 +13775,7 @@
           <p:cNvPr id="12" name="">
             <a:extLst xmlns:a="http://schemas.openxmlformats.org/drawingml/2006/main">
               <a:ext uri="{FF2B5EF4-FFF2-40B4-BE49-F238E27FC236}">
-                <a16:creationId xmlns:a16="http://schemas.microsoft.com/office/drawing/2014/main" id="{77AF2EDA-2EB1-46A0-BF41-43B234206E25}"/>
+                <a16:creationId xmlns:a16="http://schemas.microsoft.com/office/drawing/2014/main" id="{472B8106-CB98-4728-945A-E0B9EF301CAE}"/>
               </a:ext>
             </a:extLst>
           </p:cNvPr>
@@ -13632,7 +13832,7 @@
           <p:cNvPr id="13" name="">
             <a:extLst xmlns:a="http://schemas.openxmlformats.org/drawingml/2006/main">
               <a:ext uri="{FF2B5EF4-FFF2-40B4-BE49-F238E27FC236}">
-                <a16:creationId xmlns:a16="http://schemas.microsoft.com/office/drawing/2014/main" id="{86CF7544-C591-4714-9DD7-8227740B1AA0}"/>
+                <a16:creationId xmlns:a16="http://schemas.microsoft.com/office/drawing/2014/main" id="{601AFF89-5FD5-4262-9C1F-DA077D7BE922}"/>
               </a:ext>
             </a:extLst>
           </p:cNvPr>
@@ -13689,7 +13889,7 @@
           <p:cNvPr id="14" name="">
             <a:extLst xmlns:a="http://schemas.openxmlformats.org/drawingml/2006/main">
               <a:ext uri="{FF2B5EF4-FFF2-40B4-BE49-F238E27FC236}">
-                <a16:creationId xmlns:a16="http://schemas.microsoft.com/office/drawing/2014/main" id="{271A1546-2D31-4E6F-9033-8EF896BF3239}"/>
+                <a16:creationId xmlns:a16="http://schemas.microsoft.com/office/drawing/2014/main" id="{AB6EFA81-DE80-4C50-BAB1-C30B106198EA}"/>
               </a:ext>
             </a:extLst>
           </p:cNvPr>
@@ -13723,7 +13923,7 @@
           <p:cNvPr id="15" name="">
             <a:extLst xmlns:a="http://schemas.openxmlformats.org/drawingml/2006/main">
               <a:ext uri="{FF2B5EF4-FFF2-40B4-BE49-F238E27FC236}">
-                <a16:creationId xmlns:a16="http://schemas.microsoft.com/office/drawing/2014/main" id="{606FB513-738F-4E6A-B949-7039C6BFB4A3}"/>
+                <a16:creationId xmlns:a16="http://schemas.microsoft.com/office/drawing/2014/main" id="{B72AE451-A682-4BA8-BA84-45F362847E8E}"/>
               </a:ext>
             </a:extLst>
           </p:cNvPr>
@@ -13755,7 +13955,7 @@
           <p:cNvPr id="16" name="">
             <a:extLst xmlns:a="http://schemas.openxmlformats.org/drawingml/2006/main">
               <a:ext uri="{FF2B5EF4-FFF2-40B4-BE49-F238E27FC236}">
-                <a16:creationId xmlns:a16="http://schemas.microsoft.com/office/drawing/2014/main" id="{145B4366-74C3-4B47-A4B5-022DFFB71C96}"/>
+                <a16:creationId xmlns:a16="http://schemas.microsoft.com/office/drawing/2014/main" id="{89AB635D-FE36-488F-9462-E772B60D5392}"/>
               </a:ext>
             </a:extLst>
           </p:cNvPr>
@@ -13812,7 +14012,7 @@
           <p:cNvPr id="17" name="">
             <a:extLst xmlns:a="http://schemas.openxmlformats.org/drawingml/2006/main">
               <a:ext uri="{FF2B5EF4-FFF2-40B4-BE49-F238E27FC236}">
-                <a16:creationId xmlns:a16="http://schemas.microsoft.com/office/drawing/2014/main" id="{572F3CA0-D81E-4D0F-A705-F44A799B3774}"/>
+                <a16:creationId xmlns:a16="http://schemas.microsoft.com/office/drawing/2014/main" id="{993F3E2D-6E7F-41EA-BFA2-96F844F04ABD}"/>
               </a:ext>
             </a:extLst>
           </p:cNvPr>
@@ -13869,7 +14069,7 @@
           <p:cNvPr id="18" name="">
             <a:extLst xmlns:a="http://schemas.openxmlformats.org/drawingml/2006/main">
               <a:ext uri="{FF2B5EF4-FFF2-40B4-BE49-F238E27FC236}">
-                <a16:creationId xmlns:a16="http://schemas.microsoft.com/office/drawing/2014/main" id="{D434DDFF-9238-4166-83DB-3E7266E32DC5}"/>
+                <a16:creationId xmlns:a16="http://schemas.microsoft.com/office/drawing/2014/main" id="{CB0D754E-2663-429C-8EF4-DDC465EDC907}"/>
               </a:ext>
             </a:extLst>
           </p:cNvPr>
@@ -13903,7 +14103,7 @@
           <p:cNvPr id="19" name="">
             <a:extLst xmlns:a="http://schemas.openxmlformats.org/drawingml/2006/main">
               <a:ext uri="{FF2B5EF4-FFF2-40B4-BE49-F238E27FC236}">
-                <a16:creationId xmlns:a16="http://schemas.microsoft.com/office/drawing/2014/main" id="{870D43C8-83A3-4D4C-ABAE-21778EE4F922}"/>
+                <a16:creationId xmlns:a16="http://schemas.microsoft.com/office/drawing/2014/main" id="{ECF144B5-8BFA-40A7-AAC6-BCBF597F72C2}"/>
               </a:ext>
             </a:extLst>
           </p:cNvPr>
@@ -13935,7 +14135,7 @@
           <p:cNvPr id="20" name="">
             <a:extLst xmlns:a="http://schemas.openxmlformats.org/drawingml/2006/main">
               <a:ext uri="{FF2B5EF4-FFF2-40B4-BE49-F238E27FC236}">
-                <a16:creationId xmlns:a16="http://schemas.microsoft.com/office/drawing/2014/main" id="{D487AF24-49AD-4E78-A111-7E84B7D23244}"/>
+                <a16:creationId xmlns:a16="http://schemas.microsoft.com/office/drawing/2014/main" id="{D4F6FFB0-CFCF-4AE5-BBA2-D2ECD5FC555A}"/>
               </a:ext>
             </a:extLst>
           </p:cNvPr>
@@ -13992,7 +14192,7 @@
           <p:cNvPr id="21" name="">
             <a:extLst xmlns:a="http://schemas.openxmlformats.org/drawingml/2006/main">
               <a:ext uri="{FF2B5EF4-FFF2-40B4-BE49-F238E27FC236}">
-                <a16:creationId xmlns:a16="http://schemas.microsoft.com/office/drawing/2014/main" id="{58B1555F-ADC0-43DF-B236-22689E0F6CFA}"/>
+                <a16:creationId xmlns:a16="http://schemas.microsoft.com/office/drawing/2014/main" id="{7CD0AF8C-3A65-40EB-9A97-4A4CFB566075}"/>
               </a:ext>
             </a:extLst>
           </p:cNvPr>
@@ -14047,7 +14247,7 @@
     </p:spTree>
     <p:extLst>
       <p:ext uri="{BB962C8B-B14F-4D97-AF65-F5344CB8AC3E}">
-        <p14:creationId xmlns:p14="http://schemas.microsoft.com/office/powerpoint/2010/main" val="1130638078"/>
+        <p14:creationId xmlns:p14="http://schemas.microsoft.com/office/powerpoint/2010/main" val="2137990716"/>
       </p:ext>
     </p:extLst>
   </p:cSld>
